--- a/UC2026_simlabs.pptx
+++ b/UC2026_simlabs.pptx
@@ -25,6 +25,18 @@
     <p:sldId id="273" r:id="rId19"/>
     <p:sldId id="274" r:id="rId20"/>
     <p:sldId id="275" r:id="rId21"/>
+    <p:sldId id="276" r:id="rId22"/>
+    <p:sldId id="277" r:id="rId23"/>
+    <p:sldId id="278" r:id="rId24"/>
+    <p:sldId id="279" r:id="rId25"/>
+    <p:sldId id="280" r:id="rId26"/>
+    <p:sldId id="281" r:id="rId27"/>
+    <p:sldId id="282" r:id="rId28"/>
+    <p:sldId id="283" r:id="rId29"/>
+    <p:sldId id="284" r:id="rId30"/>
+    <p:sldId id="285" r:id="rId31"/>
+    <p:sldId id="286" r:id="rId32"/>
+    <p:sldId id="287" r:id="rId33"/>
   </p:sldIdLst>
   <p:sldSz cx="9144000" cy="5143500" type="screen16x9"/>
   <p:notesSz cx="6858000" cy="9144000"/>
@@ -3164,7 +3176,7 @@
             </a:pPr>
             <a:r>
               <a:rPr/>
-              <a:t>Sanja Boskovic &amp; Serhat Beyenir</a:t>
+              <a:t>Serhat Beyenir &amp; Sanja Boskovic</a:t>
             </a:r>
           </a:p>
         </p:txBody>
@@ -3211,44 +3223,69 @@
             </a:pPr>
             <a:r>
               <a:rPr/>
-              <a:t>Turbine Efficiency: Lab and Deliverables</a:t>
-            </a:r>
-          </a:p>
-        </p:txBody>
-      </p:sp>
-      <p:sp>
-        <p:nvSpPr>
-          <p:cNvPr id="3" name="Content Placeholder 2"/>
-          <p:cNvSpPr>
-            <a:spLocks noGrp="1"/>
-          </p:cNvSpPr>
+              <a:t>Data Collection</a:t>
+            </a:r>
+          </a:p>
+        </p:txBody>
+      </p:sp>
+      <p:pic>
+        <p:nvPicPr>
+          <p:cNvPr descr="figures/Trends.jpg" id="0" name="Picture 1"/>
+          <p:cNvPicPr>
+            <a:picLocks noGrp="1" noChangeAspect="1"/>
+          </p:cNvPicPr>
+          <p:nvPr/>
+        </p:nvPicPr>
+        <p:blipFill>
+          <a:blip r:embed="rId2"/>
+          <a:stretch>
+            <a:fillRect/>
+          </a:stretch>
+        </p:blipFill>
+        <p:spPr bwMode="auto">
+          <a:xfrm>
+            <a:off x="2743200" y="1193800"/>
+            <a:ext cx="3644900" cy="2882900"/>
+          </a:xfrm>
+          <a:prstGeom prst="rect">
+            <a:avLst/>
+          </a:prstGeom>
+          <a:noFill/>
+          <a:ln w="9525">
+            <a:noFill/>
+            <a:headEnd/>
+            <a:tailEnd/>
+          </a:ln>
+        </p:spPr>
+      </p:pic>
+      <p:sp>
+        <p:nvSpPr>
+          <p:cNvPr id="1" name="TextBox 3"/>
+          <p:cNvSpPr txBox="1"/>
           <p:nvPr>
             <p:ph idx="1"/>
           </p:nvPr>
         </p:nvSpPr>
-        <p:spPr/>
-        <p:txBody>
-          <a:bodyPr/>
-          <a:lstStyle/>
-          <a:p>
-            <a:pPr lvl="0"/>
+        <p:spPr>
+          <a:xfrm>
+            <a:off x="457200" y="4076700"/>
+            <a:ext cx="8229600" cy="508000"/>
+          </a:xfrm>
+          <a:prstGeom prst="rect">
+            <a:avLst/>
+          </a:prstGeom>
+          <a:noFill/>
+        </p:spPr>
+        <p:txBody>
+          <a:bodyPr/>
+          <a:lstStyle/>
+          <a:p>
+            <a:pPr lvl="0" indent="0" marL="0" algn="ctr">
+              <a:buNone/>
+            </a:pPr>
             <a:r>
               <a:rPr/>
-              <a:t>Three initial conditions: I13 (35% load), I14 (80% load), and I10 (230 MW)</a:t>
-            </a:r>
-          </a:p>
-          <a:p>
-            <a:pPr lvl="0"/>
-            <a:r>
-              <a:rPr/>
-              <a:t>Compare results across conditions to determine which load yields the most favourable efficiency</a:t>
-            </a:r>
-          </a:p>
-          <a:p>
-            <a:pPr lvl="0"/>
-            <a:r>
-              <a:rPr/>
-              <a:t>Deliverables: trend plots for all three conditions, efficiency computations, and a conclusion with suggestions for further study</a:t>
+              <a:t>Use of trends.</a:t>
             </a:r>
           </a:p>
         </p:txBody>
@@ -3295,151 +3332,169 @@
             </a:pPr>
             <a:r>
               <a:rPr/>
-              <a:t>Power Plant Efficiency: Objective and Theory</a:t>
-            </a:r>
-          </a:p>
-        </p:txBody>
-      </p:sp>
-      <mc:AlternateContent xmlns:mc="http://schemas.openxmlformats.org/markup-compatibility/2006">
-        <mc:Choice xmlns:a14="http://schemas.microsoft.com/office/drawing/2010/main" Requires="a14">
-          <p:sp>
-            <p:nvSpPr>
-              <p:cNvPr id="3" name="Content Placeholder 2"/>
-              <p:cNvSpPr>
-                <a:spLocks noGrp="1"/>
-              </p:cNvSpPr>
-              <p:nvPr>
-                <p:ph idx="1"/>
-              </p:nvPr>
-            </p:nvSpPr>
-            <p:spPr/>
-            <p:txBody>
-              <a:bodyPr/>
-              <a:lstStyle/>
-              <a:p>
-                <a:pPr lvl="0"/>
-                <a:r>
-                  <a:rPr/>
-                  <a:t>Operate the plant at full capacity and compute overall efficiency under three conditions: normal operation, high cooling water temperature (35°C), and without regeneration</a:t>
-                </a:r>
-              </a:p>
-              <a:p>
-                <a:pPr lvl="0"/>
-                <a:r>
-                  <a:rPr/>
-                  <a:t>The Rankine cycle efficiency is net work output over heat supplied in the boiler</a:t>
-                </a:r>
-              </a:p>
-              <a:p>
-                <a:pPr lvl="0" indent="0" marL="0">
-                  <a:buNone/>
-                </a:pPr>
-                <a14:m>
-                  <m:oMathPara xmlns:m="http://schemas.openxmlformats.org/officeDocument/2006/math">
-                    <m:oMathParaPr>
-                      <m:jc m:val="center"/>
-                    </m:oMathParaPr>
-                    <m:oMath>
-                      <m:sSub>
-                        <m:e>
-                          <m:r>
-                            <m:t>η</m:t>
-                          </m:r>
-                        </m:e>
-                        <m:sub>
-                          <m:r>
-                            <m:rPr>
-                              <m:nor/>
-                              <m:sty m:val="p"/>
-                            </m:rPr>
-                            <m:t>Rankine</m:t>
-                          </m:r>
-                        </m:sub>
-                      </m:sSub>
-                      <m:r>
-                        <m:rPr>
-                          <m:sty m:val="p"/>
-                        </m:rPr>
-                        <m:t>=</m:t>
-                      </m:r>
-                      <m:f>
-                        <m:fPr>
-                          <m:type m:val="bar"/>
-                        </m:fPr>
-                        <m:num>
-                          <m:sSub>
-                            <m:e>
-                              <m:r>
-                                <m:t>W</m:t>
-                              </m:r>
-                            </m:e>
-                            <m:sub>
-                              <m:r>
-                                <m:rPr>
-                                  <m:nor/>
-                                  <m:sty m:val="p"/>
-                                </m:rPr>
-                                <m:t>Turbine</m:t>
-                              </m:r>
-                            </m:sub>
-                          </m:sSub>
-                          <m:r>
-                            <m:rPr>
-                              <m:sty m:val="p"/>
-                            </m:rPr>
-                            <m:t>−</m:t>
-                          </m:r>
-                          <m:sSub>
-                            <m:e>
-                              <m:r>
-                                <m:t>W</m:t>
-                              </m:r>
-                            </m:e>
-                            <m:sub>
-                              <m:r>
-                                <m:rPr>
-                                  <m:nor/>
-                                  <m:sty m:val="p"/>
-                                </m:rPr>
-                                <m:t>Pump</m:t>
-                              </m:r>
-                            </m:sub>
-                          </m:sSub>
-                        </m:num>
-                        <m:den>
-                          <m:sSub>
-                            <m:e>
-                              <m:r>
-                                <m:t>Q</m:t>
-                              </m:r>
-                            </m:e>
-                            <m:sub>
-                              <m:r>
-                                <m:rPr>
-                                  <m:nor/>
-                                  <m:sty m:val="p"/>
-                                </m:rPr>
-                                <m:t>boiler</m:t>
-                              </m:r>
-                            </m:sub>
-                          </m:sSub>
-                        </m:den>
-                      </m:f>
-                    </m:oMath>
-                  </m:oMathPara>
-                </a14:m>
-              </a:p>
-              <a:p>
-                <a:pPr lvl="0"/>
-                <a:r>
-                  <a:rPr/>
-                  <a:t>Reheat and regeneration both raise the average temperature at which heat is supplied, improving efficiency over the simple Rankine cycle</a:t>
-                </a:r>
-              </a:p>
-            </p:txBody>
-          </p:sp>
-        </mc:Choice>
-      </mc:AlternateContent>
+              <a:t>Heating Values: Trend Tags to Log</a:t>
+            </a:r>
+          </a:p>
+        </p:txBody>
+      </p:sp>
+      <p:graphicFrame>
+        <p:nvGraphicFramePr>
+          <p:cNvPr id="6" name="Content Placeholder 5"/>
+          <p:cNvGraphicFramePr>
+            <a:graphicFrameLocks noGrp="1"/>
+          </p:cNvGraphicFramePr>
+          <p:nvPr>
+            <p:ph idx="1"/>
+          </p:nvPr>
+        </p:nvGraphicFramePr>
+        <p:xfrm>
+          <a:off x="457200" y="1193800"/>
+          <a:ext cx="8229600" cy="3390900"/>
+        </p:xfrm>
+        <a:graphic>
+          <a:graphicData uri="http://schemas.openxmlformats.org/drawingml/2006/table">
+            <a:tbl>
+              <a:tblPr firstRow="1" bandRow="1">
+                <a:tableStyleId>{5C22544A-7EE6-4342-B048-85BDC9FD1C3A}</a:tableStyleId>
+              </a:tblPr>
+              <a:tblGrid>
+                <a:gridCol w="4114800"/>
+                <a:gridCol w="4114800"/>
+              </a:tblGrid>
+              <a:tr h="0">
+                <a:tc>
+                  <a:txBody>
+                    <a:bodyPr/>
+                    <a:lstStyle/>
+                    <a:p>
+                      <a:pPr lvl="0" indent="0" marL="0">
+                        <a:buNone/>
+                      </a:pPr>
+                      <a:r>
+                        <a:rPr/>
+                        <a:t>Tag</a:t>
+                      </a:r>
+                    </a:p>
+                  </a:txBody>
+                  <a:tcPr/>
+                </a:tc>
+                <a:tc>
+                  <a:txBody>
+                    <a:bodyPr/>
+                    <a:lstStyle/>
+                    <a:p>
+                      <a:pPr lvl="0" indent="0" marL="0">
+                        <a:buNone/>
+                      </a:pPr>
+                      <a:r>
+                        <a:rPr/>
+                        <a:t>Description</a:t>
+                      </a:r>
+                    </a:p>
+                  </a:txBody>
+                  <a:tcPr/>
+                </a:tc>
+              </a:tr>
+              <a:tr h="0">
+                <a:tc>
+                  <a:txBody>
+                    <a:bodyPr/>
+                    <a:lstStyle/>
+                    <a:p>
+                      <a:pPr lvl="0" indent="0" marL="0">
+                        <a:buNone/>
+                      </a:pPr>
+                      <a:r>
+                        <a:rPr/>
+                        <a:t>H00810</a:t>
+                      </a:r>
+                    </a:p>
+                  </a:txBody>
+                </a:tc>
+                <a:tc>
+                  <a:txBody>
+                    <a:bodyPr/>
+                    <a:lstStyle/>
+                    <a:p>
+                      <a:pPr lvl="0" indent="0" marL="0">
+                        <a:buNone/>
+                      </a:pPr>
+                      <a:r>
+                        <a:rPr/>
+                        <a:t>HFO heating value</a:t>
+                      </a:r>
+                    </a:p>
+                  </a:txBody>
+                </a:tc>
+              </a:tr>
+              <a:tr h="0">
+                <a:tc>
+                  <a:txBody>
+                    <a:bodyPr/>
+                    <a:lstStyle/>
+                    <a:p>
+                      <a:pPr lvl="0" indent="0" marL="0">
+                        <a:buNone/>
+                      </a:pPr>
+                      <a:r>
+                        <a:rPr/>
+                        <a:t>H00870</a:t>
+                      </a:r>
+                    </a:p>
+                  </a:txBody>
+                </a:tc>
+                <a:tc>
+                  <a:txBody>
+                    <a:bodyPr/>
+                    <a:lstStyle/>
+                    <a:p>
+                      <a:pPr lvl="0" indent="0" marL="0">
+                        <a:buNone/>
+                      </a:pPr>
+                      <a:r>
+                        <a:rPr/>
+                        <a:t>Pellet heating value (biofuel)</a:t>
+                      </a:r>
+                    </a:p>
+                  </a:txBody>
+                </a:tc>
+              </a:tr>
+              <a:tr h="0">
+                <a:tc>
+                  <a:txBody>
+                    <a:bodyPr/>
+                    <a:lstStyle/>
+                    <a:p>
+                      <a:pPr lvl="0" indent="0" marL="0">
+                        <a:buNone/>
+                      </a:pPr>
+                      <a:r>
+                        <a:rPr/>
+                        <a:t>H00830</a:t>
+                      </a:r>
+                    </a:p>
+                  </a:txBody>
+                </a:tc>
+                <a:tc>
+                  <a:txBody>
+                    <a:bodyPr/>
+                    <a:lstStyle/>
+                    <a:p>
+                      <a:pPr lvl="0" indent="0" marL="0">
+                        <a:buNone/>
+                      </a:pPr>
+                      <a:r>
+                        <a:rPr/>
+                        <a:t>Coal heating value</a:t>
+                      </a:r>
+                    </a:p>
+                  </a:txBody>
+                </a:tc>
+              </a:tr>
+            </a:tbl>
+          </a:graphicData>
+        </a:graphic>
+      </p:graphicFrame>
     </p:spTree>
   </p:cSld>
 </p:sld>
@@ -3482,44 +3537,69 @@
             </a:pPr>
             <a:r>
               <a:rPr/>
-              <a:t>Power Plant Efficiency: Lab and Deliverables</a:t>
-            </a:r>
-          </a:p>
-        </p:txBody>
-      </p:sp>
-      <p:sp>
-        <p:nvSpPr>
-          <p:cNvPr id="3" name="Content Placeholder 2"/>
-          <p:cNvSpPr>
-            <a:spLocks noGrp="1"/>
-          </p:cNvSpPr>
+              <a:t>Simulating Soot Buildup</a:t>
+            </a:r>
+          </a:p>
+        </p:txBody>
+      </p:sp>
+      <p:pic>
+        <p:nvPicPr>
+          <p:cNvPr descr="figures/soot.jpg" id="0" name="Picture 1"/>
+          <p:cNvPicPr>
+            <a:picLocks noGrp="1" noChangeAspect="1"/>
+          </p:cNvPicPr>
+          <p:nvPr/>
+        </p:nvPicPr>
+        <p:blipFill>
+          <a:blip r:embed="rId2"/>
+          <a:stretch>
+            <a:fillRect/>
+          </a:stretch>
+        </p:blipFill>
+        <p:spPr bwMode="auto">
+          <a:xfrm>
+            <a:off x="1689100" y="1193800"/>
+            <a:ext cx="5765800" cy="2882900"/>
+          </a:xfrm>
+          <a:prstGeom prst="rect">
+            <a:avLst/>
+          </a:prstGeom>
+          <a:noFill/>
+          <a:ln w="9525">
+            <a:noFill/>
+            <a:headEnd/>
+            <a:tailEnd/>
+          </a:ln>
+        </p:spPr>
+      </p:pic>
+      <p:sp>
+        <p:nvSpPr>
+          <p:cNvPr id="1" name="TextBox 3"/>
+          <p:cNvSpPr txBox="1"/>
           <p:nvPr>
             <p:ph idx="1"/>
           </p:nvPr>
         </p:nvSpPr>
-        <p:spPr/>
-        <p:txBody>
-          <a:bodyPr/>
-          <a:lstStyle/>
-          <a:p>
-            <a:pPr lvl="0"/>
+        <p:spPr>
+          <a:xfrm>
+            <a:off x="457200" y="4076700"/>
+            <a:ext cx="8229600" cy="508000"/>
+          </a:xfrm>
+          <a:prstGeom prst="rect">
+            <a:avLst/>
+          </a:prstGeom>
+          <a:noFill/>
+        </p:spPr>
+        <p:txBody>
+          <a:bodyPr/>
+          <a:lstStyle/>
+          <a:p>
+            <a:pPr lvl="0" indent="0" marL="0" algn="ctr">
+              <a:buNone/>
+            </a:pPr>
             <a:r>
               <a:rPr/>
-              <a:t>Run initial condition I10 and draw a T-S diagram of the cycle including reheat and regeneration</a:t>
-            </a:r>
-          </a:p>
-          <a:p>
-            <a:pPr lvl="0"/>
-            <a:r>
-              <a:rPr/>
-              <a:t>Set cooling water temperature (tag T00305) to 35°C for the high temperature case, and to 10°C with extraction valves closed for the no regeneration case</a:t>
-            </a:r>
-          </a:p>
-          <a:p>
-            <a:pPr lvl="0"/>
-            <a:r>
-              <a:rPr/>
-              <a:t>Deliverables: T-S diagram, trend plots, efficiency computations for all three conditions, and a conclusion</a:t>
+              <a:t>Coal operation with soot buildup.</a:t>
             </a:r>
           </a:p>
         </p:txBody>
@@ -3566,48 +3646,611 @@
             </a:pPr>
             <a:r>
               <a:rPr/>
-              <a:t>NOx Emissions: Objective and Theory</a:t>
-            </a:r>
-          </a:p>
-        </p:txBody>
-      </p:sp>
-      <p:sp>
-        <p:nvSpPr>
-          <p:cNvPr id="3" name="Content Placeholder 2"/>
-          <p:cNvSpPr>
-            <a:spLocks noGrp="1"/>
-          </p:cNvSpPr>
+              <a:t>Normal Operation</a:t>
+            </a:r>
+          </a:p>
+        </p:txBody>
+      </p:sp>
+      <p:graphicFrame>
+        <p:nvGraphicFramePr>
+          <p:cNvPr id="6" name="Content Placeholder 5"/>
+          <p:cNvGraphicFramePr>
+            <a:graphicFrameLocks noGrp="1"/>
+          </p:cNvGraphicFramePr>
           <p:nvPr>
             <p:ph idx="1"/>
           </p:nvPr>
-        </p:nvSpPr>
-        <p:spPr/>
-        <p:txBody>
-          <a:bodyPr/>
-          <a:lstStyle/>
-          <a:p>
-            <a:pPr lvl="0"/>
-            <a:r>
-              <a:rPr/>
-              <a:t>Operate the plant at full capacity and compare NOx emissions under five conditions: normal, OFA damper failure, OBA control failure, poor quality fuel, and DeNOx plant bypassed</a:t>
-            </a:r>
-          </a:p>
-          <a:p>
-            <a:pPr lvl="0"/>
-            <a:r>
-              <a:rPr/>
-              <a:t>NOx forms through two mechanisms: thermal NOx, which rises exponentially with flame temperature, and fuel-bound NOx, which depends on fuel nitrogen content</a:t>
-            </a:r>
-          </a:p>
-          <a:p>
-            <a:pPr lvl="0"/>
-            <a:r>
-              <a:rPr/>
-              <a:t>The DeNOx plant uses selective catalytic reduction with ammonia to remove NOx from flue gas</a:t>
-            </a:r>
-          </a:p>
-        </p:txBody>
-      </p:sp>
+        </p:nvGraphicFramePr>
+        <p:xfrm>
+          <a:off x="457200" y="1193800"/>
+          <a:ext cx="8229600" cy="3390900"/>
+        </p:xfrm>
+        <a:graphic>
+          <a:graphicData uri="http://schemas.openxmlformats.org/drawingml/2006/table">
+            <a:tbl>
+              <a:tblPr firstRow="1" bandRow="1">
+                <a:tableStyleId>{5C22544A-7EE6-4342-B048-85BDC9FD1C3A}</a:tableStyleId>
+              </a:tblPr>
+              <a:tblGrid>
+                <a:gridCol w="889000"/>
+                <a:gridCol w="5232400"/>
+                <a:gridCol w="1333500"/>
+                <a:gridCol w="774700"/>
+              </a:tblGrid>
+              <a:tr h="0">
+                <a:tc>
+                  <a:txBody>
+                    <a:bodyPr/>
+                    <a:lstStyle/>
+                    <a:p>
+                      <a:pPr lvl="0" indent="0" marL="0">
+                        <a:buNone/>
+                      </a:pPr>
+                      <a:r>
+                        <a:rPr/>
+                        <a:t>Tag</a:t>
+                      </a:r>
+                    </a:p>
+                  </a:txBody>
+                  <a:tcPr/>
+                </a:tc>
+                <a:tc>
+                  <a:txBody>
+                    <a:bodyPr/>
+                    <a:lstStyle/>
+                    <a:p>
+                      <a:pPr lvl="0" indent="0" marL="0">
+                        <a:buNone/>
+                      </a:pPr>
+                      <a:r>
+                        <a:rPr/>
+                        <a:t>Description</a:t>
+                      </a:r>
+                    </a:p>
+                  </a:txBody>
+                  <a:tcPr/>
+                </a:tc>
+                <a:tc>
+                  <a:txBody>
+                    <a:bodyPr/>
+                    <a:lstStyle/>
+                    <a:p>
+                      <a:pPr lvl="0" indent="0" marL="0">
+                        <a:buNone/>
+                      </a:pPr>
+                      <a:r>
+                        <a:rPr/>
+                        <a:t>Value</a:t>
+                      </a:r>
+                    </a:p>
+                  </a:txBody>
+                  <a:tcPr/>
+                </a:tc>
+                <a:tc>
+                  <a:txBody>
+                    <a:bodyPr/>
+                    <a:lstStyle/>
+                    <a:p>
+                      <a:pPr lvl="0" indent="0" marL="0">
+                        <a:buNone/>
+                      </a:pPr>
+                      <a:r>
+                        <a:rPr/>
+                        <a:t>Unit</a:t>
+                      </a:r>
+                    </a:p>
+                  </a:txBody>
+                  <a:tcPr/>
+                </a:tc>
+              </a:tr>
+              <a:tr h="0">
+                <a:tc>
+                  <a:txBody>
+                    <a:bodyPr/>
+                    <a:lstStyle/>
+                    <a:p>
+                      <a:pPr lvl="0" indent="0" marL="0">
+                        <a:buNone/>
+                      </a:pPr>
+                      <a:r>
+                        <a:rPr/>
+                        <a:t>P02601</a:t>
+                      </a:r>
+                    </a:p>
+                  </a:txBody>
+                </a:tc>
+                <a:tc>
+                  <a:txBody>
+                    <a:bodyPr/>
+                    <a:lstStyle/>
+                    <a:p>
+                      <a:pPr lvl="0" indent="0" marL="0">
+                        <a:buNone/>
+                      </a:pPr>
+                      <a:r>
+                        <a:rPr/>
+                        <a:t>HP line steam pressure</a:t>
+                      </a:r>
+                    </a:p>
+                  </a:txBody>
+                </a:tc>
+                <a:tc>
+                  <a:txBody>
+                    <a:bodyPr/>
+                    <a:lstStyle/>
+                    <a:p>
+                      <a:pPr lvl="0" indent="0" marL="0">
+                        <a:buNone/>
+                      </a:pPr>
+                      <a:r>
+                        <a:rPr/>
+                        <a:t>144.72</a:t>
+                      </a:r>
+                    </a:p>
+                  </a:txBody>
+                </a:tc>
+                <a:tc>
+                  <a:txBody>
+                    <a:bodyPr/>
+                    <a:lstStyle/>
+                    <a:p>
+                      <a:pPr lvl="0" indent="0" marL="0">
+                        <a:buNone/>
+                      </a:pPr>
+                      <a:r>
+                        <a:rPr/>
+                        <a:t>bara</a:t>
+                      </a:r>
+                    </a:p>
+                  </a:txBody>
+                </a:tc>
+              </a:tr>
+              <a:tr h="0">
+                <a:tc>
+                  <a:txBody>
+                    <a:bodyPr/>
+                    <a:lstStyle/>
+                    <a:p>
+                      <a:pPr lvl="0" indent="0" marL="0">
+                        <a:buNone/>
+                      </a:pPr>
+                      <a:r>
+                        <a:rPr/>
+                        <a:t>T02602</a:t>
+                      </a:r>
+                    </a:p>
+                  </a:txBody>
+                </a:tc>
+                <a:tc>
+                  <a:txBody>
+                    <a:bodyPr/>
+                    <a:lstStyle/>
+                    <a:p>
+                      <a:pPr lvl="0" indent="0" marL="0">
+                        <a:buNone/>
+                      </a:pPr>
+                      <a:r>
+                        <a:rPr/>
+                        <a:t>HP line steam temperature</a:t>
+                      </a:r>
+                    </a:p>
+                  </a:txBody>
+                </a:tc>
+                <a:tc>
+                  <a:txBody>
+                    <a:bodyPr/>
+                    <a:lstStyle/>
+                    <a:p>
+                      <a:pPr lvl="0" indent="0" marL="0">
+                        <a:buNone/>
+                      </a:pPr>
+                      <a:r>
+                        <a:rPr/>
+                        <a:t>537.81</a:t>
+                      </a:r>
+                    </a:p>
+                  </a:txBody>
+                </a:tc>
+                <a:tc>
+                  <a:txBody>
+                    <a:bodyPr/>
+                    <a:lstStyle/>
+                    <a:p>
+                      <a:pPr lvl="0" indent="0" marL="0">
+                        <a:buNone/>
+                      </a:pPr>
+                      <a:r>
+                        <a:rPr/>
+                        <a:t>°C</a:t>
+                      </a:r>
+                    </a:p>
+                  </a:txBody>
+                </a:tc>
+              </a:tr>
+              <a:tr h="0">
+                <a:tc>
+                  <a:txBody>
+                    <a:bodyPr/>
+                    <a:lstStyle/>
+                    <a:p>
+                      <a:pPr lvl="0" indent="0" marL="0">
+                        <a:buNone/>
+                      </a:pPr>
+                      <a:r>
+                        <a:rPr/>
+                        <a:t>H02603</a:t>
+                      </a:r>
+                    </a:p>
+                  </a:txBody>
+                </a:tc>
+                <a:tc>
+                  <a:txBody>
+                    <a:bodyPr/>
+                    <a:lstStyle/>
+                    <a:p>
+                      <a:pPr lvl="0" indent="0" marL="0">
+                        <a:buNone/>
+                      </a:pPr>
+                      <a:r>
+                        <a:rPr/>
+                        <a:t>HP line steam enthalpy</a:t>
+                      </a:r>
+                    </a:p>
+                  </a:txBody>
+                </a:tc>
+                <a:tc>
+                  <a:txBody>
+                    <a:bodyPr/>
+                    <a:lstStyle/>
+                    <a:p>
+                      <a:pPr lvl="0" indent="0" marL="0">
+                        <a:buNone/>
+                      </a:pPr>
+                      <a:r>
+                        <a:rPr/>
+                        <a:t>3422</a:t>
+                      </a:r>
+                    </a:p>
+                  </a:txBody>
+                </a:tc>
+                <a:tc>
+                  <a:txBody>
+                    <a:bodyPr/>
+                    <a:lstStyle/>
+                    <a:p>
+                      <a:pPr lvl="0" indent="0" marL="0">
+                        <a:buNone/>
+                      </a:pPr>
+                      <a:r>
+                        <a:rPr/>
+                        <a:t>kJ/kg</a:t>
+                      </a:r>
+                    </a:p>
+                  </a:txBody>
+                </a:tc>
+              </a:tr>
+              <a:tr h="0">
+                <a:tc>
+                  <a:txBody>
+                    <a:bodyPr/>
+                    <a:lstStyle/>
+                    <a:p>
+                      <a:endParaRPr/>
+                    </a:p>
+                  </a:txBody>
+                </a:tc>
+                <a:tc>
+                  <a:txBody>
+                    <a:bodyPr/>
+                    <a:lstStyle/>
+                    <a:p>
+                      <a:endParaRPr/>
+                    </a:p>
+                  </a:txBody>
+                </a:tc>
+                <a:tc>
+                  <a:txBody>
+                    <a:bodyPr/>
+                    <a:lstStyle/>
+                    <a:p>
+                      <a:endParaRPr/>
+                    </a:p>
+                  </a:txBody>
+                </a:tc>
+                <a:tc>
+                  <a:txBody>
+                    <a:bodyPr/>
+                    <a:lstStyle/>
+                    <a:p>
+                      <a:endParaRPr/>
+                    </a:p>
+                  </a:txBody>
+                </a:tc>
+              </a:tr>
+              <a:tr h="0">
+                <a:tc>
+                  <a:txBody>
+                    <a:bodyPr/>
+                    <a:lstStyle/>
+                    <a:p>
+                      <a:pPr lvl="0" indent="0" marL="0">
+                        <a:buNone/>
+                      </a:pPr>
+                      <a:r>
+                        <a:rPr/>
+                        <a:t>T02447</a:t>
+                      </a:r>
+                    </a:p>
+                  </a:txBody>
+                </a:tc>
+                <a:tc>
+                  <a:txBody>
+                    <a:bodyPr/>
+                    <a:lstStyle/>
+                    <a:p>
+                      <a:pPr lvl="0" indent="0" marL="0">
+                        <a:buNone/>
+                      </a:pPr>
+                      <a:r>
+                        <a:rPr/>
+                        <a:t>Start up heat exchanger feedw outlet temp</a:t>
+                      </a:r>
+                    </a:p>
+                  </a:txBody>
+                </a:tc>
+                <a:tc>
+                  <a:txBody>
+                    <a:bodyPr/>
+                    <a:lstStyle/>
+                    <a:p>
+                      <a:pPr lvl="0" indent="0" marL="0">
+                        <a:buNone/>
+                      </a:pPr>
+                      <a:r>
+                        <a:rPr/>
+                        <a:t>248.92</a:t>
+                      </a:r>
+                    </a:p>
+                  </a:txBody>
+                </a:tc>
+                <a:tc>
+                  <a:txBody>
+                    <a:bodyPr/>
+                    <a:lstStyle/>
+                    <a:p>
+                      <a:pPr lvl="0" indent="0" marL="0">
+                        <a:buNone/>
+                      </a:pPr>
+                      <a:r>
+                        <a:rPr/>
+                        <a:t>°C</a:t>
+                      </a:r>
+                    </a:p>
+                  </a:txBody>
+                </a:tc>
+              </a:tr>
+              <a:tr h="0">
+                <a:tc>
+                  <a:txBody>
+                    <a:bodyPr/>
+                    <a:lstStyle/>
+                    <a:p>
+                      <a:pPr lvl="0" indent="0" marL="0">
+                        <a:buNone/>
+                      </a:pPr>
+                      <a:r>
+                        <a:rPr/>
+                        <a:t>H02448</a:t>
+                      </a:r>
+                    </a:p>
+                  </a:txBody>
+                </a:tc>
+                <a:tc>
+                  <a:txBody>
+                    <a:bodyPr/>
+                    <a:lstStyle/>
+                    <a:p>
+                      <a:pPr lvl="0" indent="0" marL="0">
+                        <a:buNone/>
+                      </a:pPr>
+                      <a:r>
+                        <a:rPr/>
+                        <a:t>Start up heat exchanger feedw outlet enthalpy</a:t>
+                      </a:r>
+                    </a:p>
+                  </a:txBody>
+                </a:tc>
+                <a:tc>
+                  <a:txBody>
+                    <a:bodyPr/>
+                    <a:lstStyle/>
+                    <a:p>
+                      <a:pPr lvl="0" indent="0" marL="0">
+                        <a:buNone/>
+                      </a:pPr>
+                      <a:r>
+                        <a:rPr/>
+                        <a:t>1071.3</a:t>
+                      </a:r>
+                    </a:p>
+                  </a:txBody>
+                </a:tc>
+                <a:tc>
+                  <a:txBody>
+                    <a:bodyPr/>
+                    <a:lstStyle/>
+                    <a:p>
+                      <a:pPr lvl="0" indent="0" marL="0">
+                        <a:buNone/>
+                      </a:pPr>
+                      <a:r>
+                        <a:rPr/>
+                        <a:t>kJ/kg</a:t>
+                      </a:r>
+                    </a:p>
+                  </a:txBody>
+                </a:tc>
+              </a:tr>
+              <a:tr h="0">
+                <a:tc>
+                  <a:txBody>
+                    <a:bodyPr/>
+                    <a:lstStyle/>
+                    <a:p>
+                      <a:endParaRPr/>
+                    </a:p>
+                  </a:txBody>
+                </a:tc>
+                <a:tc>
+                  <a:txBody>
+                    <a:bodyPr/>
+                    <a:lstStyle/>
+                    <a:p>
+                      <a:endParaRPr/>
+                    </a:p>
+                  </a:txBody>
+                </a:tc>
+                <a:tc>
+                  <a:txBody>
+                    <a:bodyPr/>
+                    <a:lstStyle/>
+                    <a:p>
+                      <a:endParaRPr/>
+                    </a:p>
+                  </a:txBody>
+                </a:tc>
+                <a:tc>
+                  <a:txBody>
+                    <a:bodyPr/>
+                    <a:lstStyle/>
+                    <a:p>
+                      <a:endParaRPr/>
+                    </a:p>
+                  </a:txBody>
+                </a:tc>
+              </a:tr>
+              <a:tr h="0">
+                <a:tc>
+                  <a:txBody>
+                    <a:bodyPr/>
+                    <a:lstStyle/>
+                    <a:p>
+                      <a:pPr lvl="0" indent="0" marL="0">
+                        <a:buNone/>
+                      </a:pPr>
+                      <a:r>
+                        <a:rPr/>
+                        <a:t>G02600</a:t>
+                      </a:r>
+                    </a:p>
+                  </a:txBody>
+                </a:tc>
+                <a:tc>
+                  <a:txBody>
+                    <a:bodyPr/>
+                    <a:lstStyle/>
+                    <a:p>
+                      <a:pPr lvl="0" indent="0" marL="0">
+                        <a:buNone/>
+                      </a:pPr>
+                      <a:r>
+                        <a:rPr/>
+                        <a:t>HP line steam flow</a:t>
+                      </a:r>
+                    </a:p>
+                  </a:txBody>
+                </a:tc>
+                <a:tc>
+                  <a:txBody>
+                    <a:bodyPr/>
+                    <a:lstStyle/>
+                    <a:p>
+                      <a:pPr lvl="0" indent="0" marL="0">
+                        <a:buNone/>
+                      </a:pPr>
+                      <a:r>
+                        <a:rPr/>
+                        <a:t>650.25</a:t>
+                      </a:r>
+                    </a:p>
+                  </a:txBody>
+                </a:tc>
+                <a:tc>
+                  <a:txBody>
+                    <a:bodyPr/>
+                    <a:lstStyle/>
+                    <a:p>
+                      <a:pPr lvl="0" indent="0" marL="0">
+                        <a:buNone/>
+                      </a:pPr>
+                      <a:r>
+                        <a:rPr/>
+                        <a:t>tonnes/h</a:t>
+                      </a:r>
+                    </a:p>
+                  </a:txBody>
+                </a:tc>
+              </a:tr>
+              <a:tr h="0">
+                <a:tc>
+                  <a:txBody>
+                    <a:bodyPr/>
+                    <a:lstStyle/>
+                    <a:p>
+                      <a:endParaRPr/>
+                    </a:p>
+                  </a:txBody>
+                </a:tc>
+                <a:tc>
+                  <a:txBody>
+                    <a:bodyPr/>
+                    <a:lstStyle/>
+                    <a:p>
+                      <a:pPr lvl="0" indent="0" marL="0">
+                        <a:buNone/>
+                      </a:pPr>
+                      <a:r>
+                        <a:rPr/>
+                        <a:t>Heat Transferred:</a:t>
+                      </a:r>
+                    </a:p>
+                  </a:txBody>
+                </a:tc>
+                <a:tc>
+                  <a:txBody>
+                    <a:bodyPr/>
+                    <a:lstStyle/>
+                    <a:p>
+                      <a:pPr lvl="0" indent="0" marL="0">
+                        <a:buNone/>
+                      </a:pPr>
+                      <a:r>
+                        <a:rPr/>
+                        <a:t>1528542675</a:t>
+                      </a:r>
+                    </a:p>
+                  </a:txBody>
+                </a:tc>
+                <a:tc>
+                  <a:txBody>
+                    <a:bodyPr/>
+                    <a:lstStyle/>
+                    <a:p>
+                      <a:pPr lvl="0" indent="0" marL="0">
+                        <a:buNone/>
+                      </a:pPr>
+                      <a:r>
+                        <a:rPr/>
+                        <a:t>kJ/h</a:t>
+                      </a:r>
+                    </a:p>
+                  </a:txBody>
+                </a:tc>
+              </a:tr>
+            </a:tbl>
+          </a:graphicData>
+        </a:graphic>
+      </p:graphicFrame>
     </p:spTree>
   </p:cSld>
 </p:sld>
@@ -3650,130 +4293,611 @@
             </a:pPr>
             <a:r>
               <a:rPr/>
-              <a:t>NOx Emissions: Lab and Deliverables</a:t>
-            </a:r>
-          </a:p>
-        </p:txBody>
-      </p:sp>
-      <mc:AlternateContent xmlns:mc="http://schemas.openxmlformats.org/markup-compatibility/2006">
-        <mc:Choice xmlns:a14="http://schemas.microsoft.com/office/drawing/2010/main" Requires="a14">
-          <p:sp>
-            <p:nvSpPr>
-              <p:cNvPr id="3" name="Content Placeholder 2"/>
-              <p:cNvSpPr>
-                <a:spLocks noGrp="1"/>
-              </p:cNvSpPr>
-              <p:nvPr>
-                <p:ph idx="1"/>
-              </p:nvPr>
-            </p:nvSpPr>
-            <p:spPr/>
-            <p:txBody>
-              <a:bodyPr/>
-              <a:lstStyle/>
-              <a:p>
-                <a:pPr lvl="0"/>
-                <a:r>
-                  <a:rPr/>
-                  <a:t>Establish a stable operation baseline, then activate OFA malfunction 0881 and OBA malfunction 0780 in turn, switch to poor quality coal, and bypass SCR 1 and SCR 2</a:t>
-                </a:r>
-              </a:p>
-              <a:p>
-                <a:pPr lvl="0"/>
-                <a:r>
-                  <a:rPr/>
-                  <a:t>Tabulate percentage deviation from baseline for each condition</a:t>
-                </a:r>
-              </a:p>
-              <a:p>
-                <a:pPr lvl="0" indent="0" marL="0">
-                  <a:buNone/>
-                </a:pPr>
-                <a14:m>
-                  <m:oMathPara xmlns:m="http://schemas.openxmlformats.org/officeDocument/2006/math">
-                    <m:oMathParaPr>
-                      <m:jc m:val="center"/>
-                    </m:oMathParaPr>
-                    <m:oMath>
-                      <m:r>
-                        <m:rPr>
-                          <m:nor/>
-                          <m:sty m:val="p"/>
-                        </m:rPr>
-                        <m:t>Percentage deviation</m:t>
-                      </m:r>
-                      <m:r>
-                        <m:rPr>
-                          <m:sty m:val="p"/>
-                        </m:rPr>
-                        <m:t>=</m:t>
-                      </m:r>
-                      <m:f>
-                        <m:fPr>
-                          <m:type m:val="bar"/>
-                        </m:fPr>
-                        <m:num>
-                          <m:r>
-                            <m:rPr>
-                              <m:nor/>
-                              <m:sty m:val="p"/>
-                            </m:rPr>
-                            <m:t>Current Value</m:t>
-                          </m:r>
-                          <m:r>
-                            <m:rPr>
-                              <m:sty m:val="p"/>
-                            </m:rPr>
-                            <m:t>−</m:t>
-                          </m:r>
-                          <m:r>
-                            <m:rPr>
-                              <m:nor/>
-                              <m:sty m:val="p"/>
-                            </m:rPr>
-                            <m:t>Reference Value</m:t>
-                          </m:r>
-                        </m:num>
-                        <m:den>
-                          <m:r>
-                            <m:rPr>
-                              <m:nor/>
-                              <m:sty m:val="p"/>
-                            </m:rPr>
-                            <m:t>Reference Value</m:t>
-                          </m:r>
-                        </m:den>
-                      </m:f>
-                      <m:r>
-                        <m:rPr>
-                          <m:sty m:val="p"/>
-                        </m:rPr>
-                        <m:t>×</m:t>
-                      </m:r>
-                      <m:r>
-                        <m:t>100</m:t>
-                      </m:r>
-                      <m:r>
-                        <m:rPr>
-                          <m:sty m:val="p"/>
-                        </m:rPr>
-                        <m:t>%</m:t>
-                      </m:r>
-                    </m:oMath>
-                  </m:oMathPara>
-                </a14:m>
-              </a:p>
-              <a:p>
-                <a:pPr lvl="0"/>
-                <a:r>
-                  <a:rPr/>
-                  <a:t>Deliverables: labelled trend plots, deviation calculations and plots, and a conclusion</a:t>
-                </a:r>
-              </a:p>
-            </p:txBody>
-          </p:sp>
-        </mc:Choice>
-      </mc:AlternateContent>
+              <a:t>Soot Buildup</a:t>
+            </a:r>
+          </a:p>
+        </p:txBody>
+      </p:sp>
+      <p:graphicFrame>
+        <p:nvGraphicFramePr>
+          <p:cNvPr id="6" name="Content Placeholder 5"/>
+          <p:cNvGraphicFramePr>
+            <a:graphicFrameLocks noGrp="1"/>
+          </p:cNvGraphicFramePr>
+          <p:nvPr>
+            <p:ph idx="1"/>
+          </p:nvPr>
+        </p:nvGraphicFramePr>
+        <p:xfrm>
+          <a:off x="457200" y="1193800"/>
+          <a:ext cx="8229600" cy="3390900"/>
+        </p:xfrm>
+        <a:graphic>
+          <a:graphicData uri="http://schemas.openxmlformats.org/drawingml/2006/table">
+            <a:tbl>
+              <a:tblPr firstRow="1" bandRow="1">
+                <a:tableStyleId>{5C22544A-7EE6-4342-B048-85BDC9FD1C3A}</a:tableStyleId>
+              </a:tblPr>
+              <a:tblGrid>
+                <a:gridCol w="889000"/>
+                <a:gridCol w="5232400"/>
+                <a:gridCol w="1333500"/>
+                <a:gridCol w="774700"/>
+              </a:tblGrid>
+              <a:tr h="0">
+                <a:tc>
+                  <a:txBody>
+                    <a:bodyPr/>
+                    <a:lstStyle/>
+                    <a:p>
+                      <a:pPr lvl="0" indent="0" marL="0">
+                        <a:buNone/>
+                      </a:pPr>
+                      <a:r>
+                        <a:rPr/>
+                        <a:t>Tag</a:t>
+                      </a:r>
+                    </a:p>
+                  </a:txBody>
+                  <a:tcPr/>
+                </a:tc>
+                <a:tc>
+                  <a:txBody>
+                    <a:bodyPr/>
+                    <a:lstStyle/>
+                    <a:p>
+                      <a:pPr lvl="0" indent="0" marL="0">
+                        <a:buNone/>
+                      </a:pPr>
+                      <a:r>
+                        <a:rPr/>
+                        <a:t>Description</a:t>
+                      </a:r>
+                    </a:p>
+                  </a:txBody>
+                  <a:tcPr/>
+                </a:tc>
+                <a:tc>
+                  <a:txBody>
+                    <a:bodyPr/>
+                    <a:lstStyle/>
+                    <a:p>
+                      <a:pPr lvl="0" indent="0" marL="0">
+                        <a:buNone/>
+                      </a:pPr>
+                      <a:r>
+                        <a:rPr/>
+                        <a:t>Value</a:t>
+                      </a:r>
+                    </a:p>
+                  </a:txBody>
+                  <a:tcPr/>
+                </a:tc>
+                <a:tc>
+                  <a:txBody>
+                    <a:bodyPr/>
+                    <a:lstStyle/>
+                    <a:p>
+                      <a:pPr lvl="0" indent="0" marL="0">
+                        <a:buNone/>
+                      </a:pPr>
+                      <a:r>
+                        <a:rPr/>
+                        <a:t>Unit</a:t>
+                      </a:r>
+                    </a:p>
+                  </a:txBody>
+                  <a:tcPr/>
+                </a:tc>
+              </a:tr>
+              <a:tr h="0">
+                <a:tc>
+                  <a:txBody>
+                    <a:bodyPr/>
+                    <a:lstStyle/>
+                    <a:p>
+                      <a:pPr lvl="0" indent="0" marL="0">
+                        <a:buNone/>
+                      </a:pPr>
+                      <a:r>
+                        <a:rPr/>
+                        <a:t>P02601</a:t>
+                      </a:r>
+                    </a:p>
+                  </a:txBody>
+                </a:tc>
+                <a:tc>
+                  <a:txBody>
+                    <a:bodyPr/>
+                    <a:lstStyle/>
+                    <a:p>
+                      <a:pPr lvl="0" indent="0" marL="0">
+                        <a:buNone/>
+                      </a:pPr>
+                      <a:r>
+                        <a:rPr/>
+                        <a:t>HP line steam pressure</a:t>
+                      </a:r>
+                    </a:p>
+                  </a:txBody>
+                </a:tc>
+                <a:tc>
+                  <a:txBody>
+                    <a:bodyPr/>
+                    <a:lstStyle/>
+                    <a:p>
+                      <a:pPr lvl="0" indent="0" marL="0">
+                        <a:buNone/>
+                      </a:pPr>
+                      <a:r>
+                        <a:rPr/>
+                        <a:t>141.72</a:t>
+                      </a:r>
+                    </a:p>
+                  </a:txBody>
+                </a:tc>
+                <a:tc>
+                  <a:txBody>
+                    <a:bodyPr/>
+                    <a:lstStyle/>
+                    <a:p>
+                      <a:pPr lvl="0" indent="0" marL="0">
+                        <a:buNone/>
+                      </a:pPr>
+                      <a:r>
+                        <a:rPr/>
+                        <a:t>bara</a:t>
+                      </a:r>
+                    </a:p>
+                  </a:txBody>
+                </a:tc>
+              </a:tr>
+              <a:tr h="0">
+                <a:tc>
+                  <a:txBody>
+                    <a:bodyPr/>
+                    <a:lstStyle/>
+                    <a:p>
+                      <a:pPr lvl="0" indent="0" marL="0">
+                        <a:buNone/>
+                      </a:pPr>
+                      <a:r>
+                        <a:rPr/>
+                        <a:t>T02602</a:t>
+                      </a:r>
+                    </a:p>
+                  </a:txBody>
+                </a:tc>
+                <a:tc>
+                  <a:txBody>
+                    <a:bodyPr/>
+                    <a:lstStyle/>
+                    <a:p>
+                      <a:pPr lvl="0" indent="0" marL="0">
+                        <a:buNone/>
+                      </a:pPr>
+                      <a:r>
+                        <a:rPr/>
+                        <a:t>HP line steam temperature</a:t>
+                      </a:r>
+                    </a:p>
+                  </a:txBody>
+                </a:tc>
+                <a:tc>
+                  <a:txBody>
+                    <a:bodyPr/>
+                    <a:lstStyle/>
+                    <a:p>
+                      <a:pPr lvl="0" indent="0" marL="0">
+                        <a:buNone/>
+                      </a:pPr>
+                      <a:r>
+                        <a:rPr/>
+                        <a:t>463.93</a:t>
+                      </a:r>
+                    </a:p>
+                  </a:txBody>
+                </a:tc>
+                <a:tc>
+                  <a:txBody>
+                    <a:bodyPr/>
+                    <a:lstStyle/>
+                    <a:p>
+                      <a:pPr lvl="0" indent="0" marL="0">
+                        <a:buNone/>
+                      </a:pPr>
+                      <a:r>
+                        <a:rPr/>
+                        <a:t>°C</a:t>
+                      </a:r>
+                    </a:p>
+                  </a:txBody>
+                </a:tc>
+              </a:tr>
+              <a:tr h="0">
+                <a:tc>
+                  <a:txBody>
+                    <a:bodyPr/>
+                    <a:lstStyle/>
+                    <a:p>
+                      <a:pPr lvl="0" indent="0" marL="0">
+                        <a:buNone/>
+                      </a:pPr>
+                      <a:r>
+                        <a:rPr/>
+                        <a:t>H02603</a:t>
+                      </a:r>
+                    </a:p>
+                  </a:txBody>
+                </a:tc>
+                <a:tc>
+                  <a:txBody>
+                    <a:bodyPr/>
+                    <a:lstStyle/>
+                    <a:p>
+                      <a:pPr lvl="0" indent="0" marL="0">
+                        <a:buNone/>
+                      </a:pPr>
+                      <a:r>
+                        <a:rPr/>
+                        <a:t>HP line steam enthalpy</a:t>
+                      </a:r>
+                    </a:p>
+                  </a:txBody>
+                </a:tc>
+                <a:tc>
+                  <a:txBody>
+                    <a:bodyPr/>
+                    <a:lstStyle/>
+                    <a:p>
+                      <a:pPr lvl="0" indent="0" marL="0">
+                        <a:buNone/>
+                      </a:pPr>
+                      <a:r>
+                        <a:rPr/>
+                        <a:t>3217.6</a:t>
+                      </a:r>
+                    </a:p>
+                  </a:txBody>
+                </a:tc>
+                <a:tc>
+                  <a:txBody>
+                    <a:bodyPr/>
+                    <a:lstStyle/>
+                    <a:p>
+                      <a:pPr lvl="0" indent="0" marL="0">
+                        <a:buNone/>
+                      </a:pPr>
+                      <a:r>
+                        <a:rPr/>
+                        <a:t>kJ/kg</a:t>
+                      </a:r>
+                    </a:p>
+                  </a:txBody>
+                </a:tc>
+              </a:tr>
+              <a:tr h="0">
+                <a:tc>
+                  <a:txBody>
+                    <a:bodyPr/>
+                    <a:lstStyle/>
+                    <a:p>
+                      <a:endParaRPr/>
+                    </a:p>
+                  </a:txBody>
+                </a:tc>
+                <a:tc>
+                  <a:txBody>
+                    <a:bodyPr/>
+                    <a:lstStyle/>
+                    <a:p>
+                      <a:endParaRPr/>
+                    </a:p>
+                  </a:txBody>
+                </a:tc>
+                <a:tc>
+                  <a:txBody>
+                    <a:bodyPr/>
+                    <a:lstStyle/>
+                    <a:p>
+                      <a:endParaRPr/>
+                    </a:p>
+                  </a:txBody>
+                </a:tc>
+                <a:tc>
+                  <a:txBody>
+                    <a:bodyPr/>
+                    <a:lstStyle/>
+                    <a:p>
+                      <a:endParaRPr/>
+                    </a:p>
+                  </a:txBody>
+                </a:tc>
+              </a:tr>
+              <a:tr h="0">
+                <a:tc>
+                  <a:txBody>
+                    <a:bodyPr/>
+                    <a:lstStyle/>
+                    <a:p>
+                      <a:pPr lvl="0" indent="0" marL="0">
+                        <a:buNone/>
+                      </a:pPr>
+                      <a:r>
+                        <a:rPr/>
+                        <a:t>T02447</a:t>
+                      </a:r>
+                    </a:p>
+                  </a:txBody>
+                </a:tc>
+                <a:tc>
+                  <a:txBody>
+                    <a:bodyPr/>
+                    <a:lstStyle/>
+                    <a:p>
+                      <a:pPr lvl="0" indent="0" marL="0">
+                        <a:buNone/>
+                      </a:pPr>
+                      <a:r>
+                        <a:rPr/>
+                        <a:t>Start up heat exchanger feedw outlet temp</a:t>
+                      </a:r>
+                    </a:p>
+                  </a:txBody>
+                </a:tc>
+                <a:tc>
+                  <a:txBody>
+                    <a:bodyPr/>
+                    <a:lstStyle/>
+                    <a:p>
+                      <a:pPr lvl="0" indent="0" marL="0">
+                        <a:buNone/>
+                      </a:pPr>
+                      <a:r>
+                        <a:rPr/>
+                        <a:t>243.08</a:t>
+                      </a:r>
+                    </a:p>
+                  </a:txBody>
+                </a:tc>
+                <a:tc>
+                  <a:txBody>
+                    <a:bodyPr/>
+                    <a:lstStyle/>
+                    <a:p>
+                      <a:pPr lvl="0" indent="0" marL="0">
+                        <a:buNone/>
+                      </a:pPr>
+                      <a:r>
+                        <a:rPr/>
+                        <a:t>°C</a:t>
+                      </a:r>
+                    </a:p>
+                  </a:txBody>
+                </a:tc>
+              </a:tr>
+              <a:tr h="0">
+                <a:tc>
+                  <a:txBody>
+                    <a:bodyPr/>
+                    <a:lstStyle/>
+                    <a:p>
+                      <a:pPr lvl="0" indent="0" marL="0">
+                        <a:buNone/>
+                      </a:pPr>
+                      <a:r>
+                        <a:rPr/>
+                        <a:t>H02448</a:t>
+                      </a:r>
+                    </a:p>
+                  </a:txBody>
+                </a:tc>
+                <a:tc>
+                  <a:txBody>
+                    <a:bodyPr/>
+                    <a:lstStyle/>
+                    <a:p>
+                      <a:pPr lvl="0" indent="0" marL="0">
+                        <a:buNone/>
+                      </a:pPr>
+                      <a:r>
+                        <a:rPr/>
+                        <a:t>Start up heat exchanger feedw outlet enthalpy</a:t>
+                      </a:r>
+                    </a:p>
+                  </a:txBody>
+                </a:tc>
+                <a:tc>
+                  <a:txBody>
+                    <a:bodyPr/>
+                    <a:lstStyle/>
+                    <a:p>
+                      <a:pPr lvl="0" indent="0" marL="0">
+                        <a:buNone/>
+                      </a:pPr>
+                      <a:r>
+                        <a:rPr/>
+                        <a:t>1046.3</a:t>
+                      </a:r>
+                    </a:p>
+                  </a:txBody>
+                </a:tc>
+                <a:tc>
+                  <a:txBody>
+                    <a:bodyPr/>
+                    <a:lstStyle/>
+                    <a:p>
+                      <a:pPr lvl="0" indent="0" marL="0">
+                        <a:buNone/>
+                      </a:pPr>
+                      <a:r>
+                        <a:rPr/>
+                        <a:t>kJ/kg</a:t>
+                      </a:r>
+                    </a:p>
+                  </a:txBody>
+                </a:tc>
+              </a:tr>
+              <a:tr h="0">
+                <a:tc>
+                  <a:txBody>
+                    <a:bodyPr/>
+                    <a:lstStyle/>
+                    <a:p>
+                      <a:endParaRPr/>
+                    </a:p>
+                  </a:txBody>
+                </a:tc>
+                <a:tc>
+                  <a:txBody>
+                    <a:bodyPr/>
+                    <a:lstStyle/>
+                    <a:p>
+                      <a:endParaRPr/>
+                    </a:p>
+                  </a:txBody>
+                </a:tc>
+                <a:tc>
+                  <a:txBody>
+                    <a:bodyPr/>
+                    <a:lstStyle/>
+                    <a:p>
+                      <a:endParaRPr/>
+                    </a:p>
+                  </a:txBody>
+                </a:tc>
+                <a:tc>
+                  <a:txBody>
+                    <a:bodyPr/>
+                    <a:lstStyle/>
+                    <a:p>
+                      <a:endParaRPr/>
+                    </a:p>
+                  </a:txBody>
+                </a:tc>
+              </a:tr>
+              <a:tr h="0">
+                <a:tc>
+                  <a:txBody>
+                    <a:bodyPr/>
+                    <a:lstStyle/>
+                    <a:p>
+                      <a:pPr lvl="0" indent="0" marL="0">
+                        <a:buNone/>
+                      </a:pPr>
+                      <a:r>
+                        <a:rPr/>
+                        <a:t>G02600</a:t>
+                      </a:r>
+                    </a:p>
+                  </a:txBody>
+                </a:tc>
+                <a:tc>
+                  <a:txBody>
+                    <a:bodyPr/>
+                    <a:lstStyle/>
+                    <a:p>
+                      <a:pPr lvl="0" indent="0" marL="0">
+                        <a:buNone/>
+                      </a:pPr>
+                      <a:r>
+                        <a:rPr/>
+                        <a:t>HP line steam flow</a:t>
+                      </a:r>
+                    </a:p>
+                  </a:txBody>
+                </a:tc>
+                <a:tc>
+                  <a:txBody>
+                    <a:bodyPr/>
+                    <a:lstStyle/>
+                    <a:p>
+                      <a:pPr lvl="0" indent="0" marL="0">
+                        <a:buNone/>
+                      </a:pPr>
+                      <a:r>
+                        <a:rPr/>
+                        <a:t>666.3</a:t>
+                      </a:r>
+                    </a:p>
+                  </a:txBody>
+                </a:tc>
+                <a:tc>
+                  <a:txBody>
+                    <a:bodyPr/>
+                    <a:lstStyle/>
+                    <a:p>
+                      <a:pPr lvl="0" indent="0" marL="0">
+                        <a:buNone/>
+                      </a:pPr>
+                      <a:r>
+                        <a:rPr/>
+                        <a:t>tonnes/h</a:t>
+                      </a:r>
+                    </a:p>
+                  </a:txBody>
+                </a:tc>
+              </a:tr>
+              <a:tr h="0">
+                <a:tc>
+                  <a:txBody>
+                    <a:bodyPr/>
+                    <a:lstStyle/>
+                    <a:p>
+                      <a:endParaRPr/>
+                    </a:p>
+                  </a:txBody>
+                </a:tc>
+                <a:tc>
+                  <a:txBody>
+                    <a:bodyPr/>
+                    <a:lstStyle/>
+                    <a:p>
+                      <a:pPr lvl="0" indent="0" marL="0">
+                        <a:buNone/>
+                      </a:pPr>
+                      <a:r>
+                        <a:rPr/>
+                        <a:t>Heat Transferred:</a:t>
+                      </a:r>
+                    </a:p>
+                  </a:txBody>
+                </a:tc>
+                <a:tc>
+                  <a:txBody>
+                    <a:bodyPr/>
+                    <a:lstStyle/>
+                    <a:p>
+                      <a:pPr lvl="0" indent="0" marL="0">
+                        <a:buNone/>
+                      </a:pPr>
+                      <a:r>
+                        <a:rPr/>
+                        <a:t>1446737190</a:t>
+                      </a:r>
+                    </a:p>
+                  </a:txBody>
+                </a:tc>
+                <a:tc>
+                  <a:txBody>
+                    <a:bodyPr/>
+                    <a:lstStyle/>
+                    <a:p>
+                      <a:pPr lvl="0" indent="0" marL="0">
+                        <a:buNone/>
+                      </a:pPr>
+                      <a:r>
+                        <a:rPr/>
+                        <a:t>kJ/h</a:t>
+                      </a:r>
+                    </a:p>
+                  </a:txBody>
+                </a:tc>
+              </a:tr>
+            </a:tbl>
+          </a:graphicData>
+        </a:graphic>
+      </p:graphicFrame>
     </p:spTree>
   </p:cSld>
 </p:sld>
@@ -3816,175 +4940,48 @@
             </a:pPr>
             <a:r>
               <a:rPr/>
-              <a:t>Heat Exchangers: Objective and Theory</a:t>
-            </a:r>
-          </a:p>
-        </p:txBody>
-      </p:sp>
-      <mc:AlternateContent xmlns:mc="http://schemas.openxmlformats.org/markup-compatibility/2006">
-        <mc:Choice xmlns:a14="http://schemas.microsoft.com/office/drawing/2010/main" Requires="a14">
-          <p:sp>
-            <p:nvSpPr>
-              <p:cNvPr id="3" name="Content Placeholder 2"/>
-              <p:cNvSpPr>
-                <a:spLocks noGrp="1"/>
-              </p:cNvSpPr>
-              <p:nvPr>
-                <p:ph idx="1"/>
-              </p:nvPr>
-            </p:nvSpPr>
-            <p:spPr/>
-            <p:txBody>
-              <a:bodyPr/>
-              <a:lstStyle/>
-              <a:p>
-                <a:pPr lvl="0"/>
-                <a:r>
-                  <a:rPr/>
-                  <a:t>Operate the plant at full capacity and study the effect of heat exchanger surface area using LP Feed Heater 3</a:t>
-                </a:r>
-              </a:p>
-              <a:p>
-                <a:pPr lvl="0"/>
-                <a:r>
-                  <a:rPr/>
-                  <a:t>Parallel flow heat exchangers have their largest temperature difference at the inlet, while counter flow heat exchangers maintain a more constant temperature difference along their length</a:t>
-                </a:r>
-              </a:p>
-              <a:p>
-                <a:pPr lvl="0"/>
-                <a:r>
-                  <a:rPr/>
-                  <a:t>Heat transfer depends on the heat area factor (UA) and the log mean temperature difference</a:t>
-                </a:r>
-              </a:p>
-              <a:p>
-                <a:pPr lvl="0" indent="0" marL="0">
-                  <a:buNone/>
-                </a:pPr>
-                <a14:m>
-                  <m:oMathPara xmlns:m="http://schemas.openxmlformats.org/officeDocument/2006/math">
-                    <m:oMathParaPr>
-                      <m:jc m:val="center"/>
-                    </m:oMathParaPr>
-                    <m:oMath>
-                      <m:r>
-                        <m:t>Q</m:t>
-                      </m:r>
-                      <m:r>
-                        <m:rPr>
-                          <m:sty m:val="p"/>
-                        </m:rPr>
-                        <m:t>=</m:t>
-                      </m:r>
-                      <m:r>
-                        <m:t>F</m:t>
-                      </m:r>
-                      <m:r>
-                        <m:rPr>
-                          <m:sty m:val="p"/>
-                        </m:rPr>
-                        <m:t>⋅</m:t>
-                      </m:r>
-                      <m:r>
-                        <m:rPr>
-                          <m:sty m:val="p"/>
-                        </m:rPr>
-                        <m:t>(</m:t>
-                      </m:r>
-                      <m:r>
-                        <m:t>U</m:t>
-                      </m:r>
-                      <m:r>
-                        <m:t>A</m:t>
-                      </m:r>
-                      <m:r>
-                        <m:rPr>
-                          <m:sty m:val="p"/>
-                        </m:rPr>
-                        <m:t>)</m:t>
-                      </m:r>
-                      <m:r>
-                        <m:rPr>
-                          <m:sty m:val="p"/>
-                        </m:rPr>
-                        <m:t>⋅</m:t>
-                      </m:r>
-                      <m:r>
-                        <m:rPr>
-                          <m:sty m:val="p"/>
-                        </m:rPr>
-                        <m:t>Δ</m:t>
-                      </m:r>
-                      <m:sSub>
-                        <m:e>
-                          <m:r>
-                            <m:t>T</m:t>
-                          </m:r>
-                        </m:e>
-                        <m:sub>
-                          <m:r>
-                            <m:rPr>
-                              <m:nor/>
-                              <m:sty m:val="p"/>
-                            </m:rPr>
-                            <m:t>LMTD</m:t>
-                          </m:r>
-                        </m:sub>
-                      </m:sSub>
-                      <m:r>
-                        <m:rPr>
-                          <m:sty m:val="p"/>
-                        </m:rPr>
-                        <m:t>,</m:t>
-                      </m:r>
-                      <m:r>
-                        <m:t>  </m:t>
-                      </m:r>
-                      <m:r>
-                        <m:t>ε</m:t>
-                      </m:r>
-                      <m:r>
-                        <m:rPr>
-                          <m:sty m:val="p"/>
-                        </m:rPr>
-                        <m:t>=</m:t>
-                      </m:r>
-                      <m:f>
-                        <m:fPr>
-                          <m:type m:val="bar"/>
-                        </m:fPr>
-                        <m:num>
-                          <m:r>
-                            <m:t>Q</m:t>
-                          </m:r>
-                        </m:num>
-                        <m:den>
-                          <m:sSub>
-                            <m:e>
-                              <m:r>
-                                <m:t>Q</m:t>
-                              </m:r>
-                            </m:e>
-                            <m:sub>
-                              <m:r>
-                                <m:rPr>
-                                  <m:sty m:val="p"/>
-                                </m:rPr>
-                                <m:t>max</m:t>
-                              </m:r>
-                            </m:sub>
-                          </m:sSub>
-                        </m:den>
-                      </m:f>
-                    </m:oMath>
-                  </m:oMathPara>
-                </a14:m>
-              </a:p>
-            </p:txBody>
-          </p:sp>
-        </mc:Choice>
-      </mc:AlternateContent>
+              <a:t>Boiler Efficiency: Lab and Deliverables</a:t>
+            </a:r>
+          </a:p>
+        </p:txBody>
+      </p:sp>
+      <p:sp>
+        <p:nvSpPr>
+          <p:cNvPr id="3" name="Content Placeholder 2"/>
+          <p:cNvSpPr>
+            <a:spLocks noGrp="1"/>
+          </p:cNvSpPr>
+          <p:nvPr>
+            <p:ph idx="1"/>
+          </p:nvPr>
+        </p:nvSpPr>
+        <p:spPr/>
+        <p:txBody>
+          <a:bodyPr/>
+          <a:lstStyle/>
+          <a:p>
+            <a:pPr lvl="0"/>
+            <a:r>
+              <a:rPr/>
+              <a:t>Four initial conditions: I10, I15, I14 (coal), and I14 with soot configured via MD250</a:t>
+            </a:r>
+          </a:p>
+          <a:p>
+            <a:pPr lvl="0"/>
+            <a:r>
+              <a:rPr/>
+              <a:t>Log HFO, pellet, and coal heating value tags, then use steam tables to find enthalpy values</a:t>
+            </a:r>
+          </a:p>
+          <a:p>
+            <a:pPr lvl="0"/>
+            <a:r>
+              <a:rPr/>
+              <a:t>Deliverables: trend plots for all four conditions, efficiency computations, and a conclusion comparing results</a:t>
+            </a:r>
+          </a:p>
+        </p:txBody>
+      </p:sp>
     </p:spTree>
   </p:cSld>
 </p:sld>
@@ -4017,7 +5014,12 @@
             <p:ph type="title"/>
           </p:nvPr>
         </p:nvSpPr>
-        <p:spPr/>
+        <p:spPr>
+          <a:xfrm>
+            <a:off x="722313" y="3305176"/>
+            <a:ext cx="7772400" cy="1021556"/>
+          </a:xfrm>
+        </p:spPr>
         <p:txBody>
           <a:bodyPr/>
           <a:lstStyle/>
@@ -4027,44 +5029,7 @@
             </a:pPr>
             <a:r>
               <a:rPr/>
-              <a:t>Heat Exchangers: Lab and Deliverables</a:t>
-            </a:r>
-          </a:p>
-        </p:txBody>
-      </p:sp>
-      <p:sp>
-        <p:nvSpPr>
-          <p:cNvPr id="3" name="Content Placeholder 2"/>
-          <p:cNvSpPr>
-            <a:spLocks noGrp="1"/>
-          </p:cNvSpPr>
-          <p:nvPr>
-            <p:ph idx="1"/>
-          </p:nvPr>
-        </p:nvSpPr>
-        <p:spPr/>
-        <p:txBody>
-          <a:bodyPr/>
-          <a:lstStyle/>
-          <a:p>
-            <a:pPr lvl="0"/>
-            <a:r>
-              <a:rPr/>
-              <a:t>Run initial condition I10 and vary the Heat Area Factor (tag C34201) across three levels: 0.5, 1.0, and 1.5</a:t>
-            </a:r>
-          </a:p>
-          <a:p>
-            <a:pPr lvl="0"/>
-            <a:r>
-              <a:rPr/>
-              <a:t>Run each setting for 15 minutes, then freeze and print trends</a:t>
-            </a:r>
-          </a:p>
-          <a:p>
-            <a:pPr lvl="0"/>
-            <a:r>
-              <a:rPr/>
-              <a:t>Deliverables: labelled trend plots for each setting, LMTD and effectiveness calculations, and a conclusion comparing the three tests</a:t>
+              <a:t>Turbine Efficiency</a:t>
             </a:r>
           </a:p>
         </p:txBody>
@@ -4111,1284 +5076,7 @@
             </a:pPr>
             <a:r>
               <a:rPr/>
-              <a:t>Combustion Analysis: Objective and Theory</a:t>
-            </a:r>
-          </a:p>
-        </p:txBody>
-      </p:sp>
-      <mc:AlternateContent xmlns:mc="http://schemas.openxmlformats.org/markup-compatibility/2006">
-        <mc:Choice xmlns:a14="http://schemas.microsoft.com/office/drawing/2010/main" Requires="a14">
-          <p:sp>
-            <p:nvSpPr>
-              <p:cNvPr id="3" name="Content Placeholder 2"/>
-              <p:cNvSpPr>
-                <a:spLocks noGrp="1"/>
-              </p:cNvSpPr>
-              <p:nvPr>
-                <p:ph idx="1"/>
-              </p:nvPr>
-            </p:nvSpPr>
-            <p:spPr/>
-            <p:txBody>
-              <a:bodyPr/>
-              <a:lstStyle/>
-              <a:p>
-                <a:pPr lvl="0"/>
-                <a:r>
-                  <a:rPr/>
-                  <a:t>Operate the plant at 80% capacity burning coal to perform combustion analyses for two coal types and compare results</a:t>
-                </a:r>
-              </a:p>
-              <a:p>
-                <a:pPr lvl="0"/>
-                <a:r>
-                  <a:rPr/>
-                  <a:t>The stoichiometric combustion equation balances carbon, hydrogen, and nitrogen between fuel and air</a:t>
-                </a:r>
-              </a:p>
-              <a:p>
-                <a:pPr lvl="0" indent="0" marL="0">
-                  <a:buNone/>
-                </a:pPr>
-                <a14:m>
-                  <m:oMathPara xmlns:m="http://schemas.openxmlformats.org/officeDocument/2006/math">
-                    <m:oMathParaPr>
-                      <m:jc m:val="center"/>
-                    </m:oMathParaPr>
-                    <m:oMath>
-                      <m:sSub>
-                        <m:e>
-                          <m:r>
-                            <m:rPr>
-                              <m:nor/>
-                              <m:sty m:val="p"/>
-                            </m:rPr>
-                            <m:t>C</m:t>
-                          </m:r>
-                        </m:e>
-                        <m:sub>
-                          <m:r>
-                            <m:t>n</m:t>
-                          </m:r>
-                        </m:sub>
-                      </m:sSub>
-                      <m:sSub>
-                        <m:e>
-                          <m:r>
-                            <m:rPr>
-                              <m:nor/>
-                              <m:sty m:val="p"/>
-                            </m:rPr>
-                            <m:t>H</m:t>
-                          </m:r>
-                        </m:e>
-                        <m:sub>
-                          <m:r>
-                            <m:t>m</m:t>
-                          </m:r>
-                        </m:sub>
-                      </m:sSub>
-                      <m:r>
-                        <m:rPr>
-                          <m:sty m:val="p"/>
-                        </m:rPr>
-                        <m:t>+</m:t>
-                      </m:r>
-                      <m:r>
-                        <m:t>y</m:t>
-                      </m:r>
-                      <m:r>
-                        <m:t>​</m:t>
-                      </m:r>
-                      <m:d>
-                        <m:dPr>
-                          <m:begChr m:val="("/>
-                          <m:sepChr m:val=""/>
-                          <m:endChr m:val=")"/>
-                          <m:grow/>
-                        </m:dPr>
-                        <m:e>
-                          <m:sSub>
-                            <m:e>
-                              <m:r>
-                                <m:rPr>
-                                  <m:nor/>
-                                  <m:sty m:val="p"/>
-                                </m:rPr>
-                                <m:t>O</m:t>
-                              </m:r>
-                            </m:e>
-                            <m:sub>
-                              <m:r>
-                                <m:t>2</m:t>
-                              </m:r>
-                            </m:sub>
-                          </m:sSub>
-                          <m:r>
-                            <m:rPr>
-                              <m:sty m:val="p"/>
-                            </m:rPr>
-                            <m:t>+</m:t>
-                          </m:r>
-                          <m:f>
-                            <m:fPr>
-                              <m:type m:val="bar"/>
-                            </m:fPr>
-                            <m:num>
-                              <m:r>
-                                <m:t>79</m:t>
-                              </m:r>
-                            </m:num>
-                            <m:den>
-                              <m:r>
-                                <m:t>21</m:t>
-                              </m:r>
-                            </m:den>
-                          </m:f>
-                          <m:r>
-                            <m:t> </m:t>
-                          </m:r>
-                          <m:sSub>
-                            <m:e>
-                              <m:r>
-                                <m:rPr>
-                                  <m:nor/>
-                                  <m:sty m:val="p"/>
-                                </m:rPr>
-                                <m:t>N</m:t>
-                              </m:r>
-                            </m:e>
-                            <m:sub>
-                              <m:r>
-                                <m:t>2</m:t>
-                              </m:r>
-                            </m:sub>
-                          </m:sSub>
-                        </m:e>
-                      </m:d>
-                      <m:r>
-                        <m:rPr>
-                          <m:sty m:val="p"/>
-                        </m:rPr>
-                        <m:t>→</m:t>
-                      </m:r>
-                      <m:r>
-                        <m:t>a</m:t>
-                      </m:r>
-                      <m:r>
-                        <m:t> </m:t>
-                      </m:r>
-                      <m:sSub>
-                        <m:e>
-                          <m:r>
-                            <m:rPr>
-                              <m:nor/>
-                              <m:sty m:val="p"/>
-                            </m:rPr>
-                            <m:t>CO</m:t>
-                          </m:r>
-                        </m:e>
-                        <m:sub>
-                          <m:r>
-                            <m:t>2</m:t>
-                          </m:r>
-                        </m:sub>
-                      </m:sSub>
-                      <m:r>
-                        <m:rPr>
-                          <m:sty m:val="p"/>
-                        </m:rPr>
-                        <m:t>+</m:t>
-                      </m:r>
-                      <m:r>
-                        <m:t>b</m:t>
-                      </m:r>
-                      <m:r>
-                        <m:t> </m:t>
-                      </m:r>
-                      <m:sSub>
-                        <m:e>
-                          <m:r>
-                            <m:rPr>
-                              <m:nor/>
-                              <m:sty m:val="p"/>
-                            </m:rPr>
-                            <m:t>H</m:t>
-                          </m:r>
-                        </m:e>
-                        <m:sub>
-                          <m:r>
-                            <m:t>2</m:t>
-                          </m:r>
-                        </m:sub>
-                      </m:sSub>
-                      <m:r>
-                        <m:rPr>
-                          <m:nor/>
-                          <m:sty m:val="p"/>
-                        </m:rPr>
-                        <m:t>O</m:t>
-                      </m:r>
-                      <m:r>
-                        <m:rPr>
-                          <m:sty m:val="p"/>
-                        </m:rPr>
-                        <m:t>+</m:t>
-                      </m:r>
-                      <m:r>
-                        <m:t>c</m:t>
-                      </m:r>
-                      <m:r>
-                        <m:t> </m:t>
-                      </m:r>
-                      <m:sSub>
-                        <m:e>
-                          <m:r>
-                            <m:rPr>
-                              <m:nor/>
-                              <m:sty m:val="p"/>
-                            </m:rPr>
-                            <m:t>N</m:t>
-                          </m:r>
-                        </m:e>
-                        <m:sub>
-                          <m:r>
-                            <m:t>2</m:t>
-                          </m:r>
-                        </m:sub>
-                      </m:sSub>
-                    </m:oMath>
-                  </m:oMathPara>
-                </a14:m>
-              </a:p>
-              <a:p>
-                <a:pPr lvl="0"/>
-                <a:r>
-                  <a:rPr/>
-                  <a:t>Worked example: stoichiometric combustion of octane yields an air to fuel mass ratio of 15.25 kg air per kg fuel</a:t>
-                </a:r>
-              </a:p>
-            </p:txBody>
-          </p:sp>
-        </mc:Choice>
-      </mc:AlternateContent>
-    </p:spTree>
-  </p:cSld>
-</p:sld>
-</file>
-
-<file path=ppt/slides/slide18.xml><?xml version="1.0" encoding="utf-8"?>
-<p:sld xmlns:a="http://schemas.openxmlformats.org/drawingml/2006/main" xmlns:r="http://schemas.openxmlformats.org/officeDocument/2006/relationships" xmlns:p="http://schemas.openxmlformats.org/presentationml/2006/main">
-  <p:cSld>
-    <p:spTree>
-      <p:nvGrpSpPr>
-        <p:cNvPr id="1" name=""/>
-        <p:cNvGrpSpPr/>
-        <p:nvPr/>
-      </p:nvGrpSpPr>
-      <p:grpSpPr>
-        <a:xfrm>
-          <a:off x="0" y="0"/>
-          <a:ext cx="0" cy="0"/>
-          <a:chOff x="0" y="0"/>
-          <a:chExt cx="0" cy="0"/>
-        </a:xfrm>
-      </p:grpSpPr>
-      <p:sp>
-        <p:nvSpPr>
-          <p:cNvPr id="2" name="Title 1"/>
-          <p:cNvSpPr>
-            <a:spLocks noGrp="1"/>
-          </p:cNvSpPr>
-          <p:nvPr>
-            <p:ph type="title"/>
-          </p:nvPr>
-        </p:nvSpPr>
-        <p:spPr/>
-        <p:txBody>
-          <a:bodyPr/>
-          <a:lstStyle/>
-          <a:p>
-            <a:pPr lvl="0" indent="0" marL="0">
-              <a:buNone/>
-            </a:pPr>
-            <a:r>
-              <a:rPr/>
-              <a:t>Combustion Analysis: Lab and Deliverables</a:t>
-            </a:r>
-          </a:p>
-        </p:txBody>
-      </p:sp>
-      <p:sp>
-        <p:nvSpPr>
-          <p:cNvPr id="3" name="Content Placeholder 2"/>
-          <p:cNvSpPr>
-            <a:spLocks noGrp="1"/>
-          </p:cNvSpPr>
-          <p:nvPr>
-            <p:ph idx="1"/>
-          </p:nvPr>
-        </p:nvSpPr>
-        <p:spPr/>
-        <p:txBody>
-          <a:bodyPr/>
-          <a:lstStyle/>
-          <a:p>
-            <a:pPr lvl="0"/>
-            <a:r>
-              <a:rPr/>
-              <a:t>Run initial condition I14 with default coal, then switch to poor quality coal using Variable List page 0111 on MD180</a:t>
-            </a:r>
-          </a:p>
-          <a:p>
-            <a:pPr lvl="0"/>
-            <a:r>
-              <a:rPr/>
-              <a:t>For both fuels, calculate total O2 required, stoichiometric air, product mass, and mass percentage of CO2, H2O, SO2, and N2</a:t>
-            </a:r>
-          </a:p>
-          <a:p>
-            <a:pPr lvl="0"/>
-            <a:r>
-              <a:rPr/>
-              <a:t>Compare furnace outlet SOx and NOx flow, CO and O2 content, theoretical combustion air, and coal heat value</a:t>
-            </a:r>
-          </a:p>
-          <a:p>
-            <a:pPr lvl="0"/>
-            <a:r>
-              <a:rPr/>
-              <a:t>Deliverables: labelled trend plots, combustion analyses for both fuels, and a conclusion</a:t>
-            </a:r>
-          </a:p>
-        </p:txBody>
-      </p:sp>
-    </p:spTree>
-  </p:cSld>
-</p:sld>
-</file>
-
-<file path=ppt/slides/slide19.xml><?xml version="1.0" encoding="utf-8"?>
-<p:sld xmlns:a="http://schemas.openxmlformats.org/drawingml/2006/main" xmlns:r="http://schemas.openxmlformats.org/officeDocument/2006/relationships" xmlns:p="http://schemas.openxmlformats.org/presentationml/2006/main">
-  <p:cSld>
-    <p:spTree>
-      <p:nvGrpSpPr>
-        <p:cNvPr id="1" name=""/>
-        <p:cNvGrpSpPr/>
-        <p:nvPr/>
-      </p:nvGrpSpPr>
-      <p:grpSpPr>
-        <a:xfrm>
-          <a:off x="0" y="0"/>
-          <a:ext cx="0" cy="0"/>
-          <a:chOff x="0" y="0"/>
-          <a:chExt cx="0" cy="0"/>
-        </a:xfrm>
-      </p:grpSpPr>
-      <p:sp>
-        <p:nvSpPr>
-          <p:cNvPr id="2" name="Title 1"/>
-          <p:cNvSpPr>
-            <a:spLocks noGrp="1"/>
-          </p:cNvSpPr>
-          <p:nvPr>
-            <p:ph type="title"/>
-          </p:nvPr>
-        </p:nvSpPr>
-        <p:spPr/>
-        <p:txBody>
-          <a:bodyPr/>
-          <a:lstStyle/>
-          <a:p>
-            <a:pPr lvl="0" indent="0" marL="0">
-              <a:buNone/>
-            </a:pPr>
-            <a:r>
-              <a:rPr/>
-              <a:t>Summary</a:t>
-            </a:r>
-          </a:p>
-        </p:txBody>
-      </p:sp>
-      <p:sp>
-        <p:nvSpPr>
-          <p:cNvPr id="3" name="Content Placeholder 2"/>
-          <p:cNvSpPr>
-            <a:spLocks noGrp="1"/>
-          </p:cNvSpPr>
-          <p:nvPr>
-            <p:ph idx="1"/>
-          </p:nvPr>
-        </p:nvSpPr>
-        <p:spPr/>
-        <p:txBody>
-          <a:bodyPr/>
-          <a:lstStyle/>
-          <a:p>
-            <a:pPr lvl="0"/>
-            <a:r>
-              <a:rPr/>
-              <a:t>SIM LABS bridge the gap between theory and practical plant operation</a:t>
-            </a:r>
-          </a:p>
-          <a:p>
-            <a:pPr lvl="0"/>
-            <a:r>
-              <a:rPr/>
-              <a:t>Six labs featured today span efficiency, emissions, heat transfer, and combustion topics</a:t>
-            </a:r>
-          </a:p>
-          <a:p>
-            <a:pPr lvl="0"/>
-            <a:r>
-              <a:rPr/>
-              <a:t>Each lab pairs a theoretical model with hands on simulator operation, reinforcing safe practice and environmental awareness</a:t>
-            </a:r>
-          </a:p>
-        </p:txBody>
-      </p:sp>
-    </p:spTree>
-  </p:cSld>
-</p:sld>
-</file>
-
-<file path=ppt/slides/slide2.xml><?xml version="1.0" encoding="utf-8"?>
-<p:sld xmlns:a="http://schemas.openxmlformats.org/drawingml/2006/main" xmlns:r="http://schemas.openxmlformats.org/officeDocument/2006/relationships" xmlns:p="http://schemas.openxmlformats.org/presentationml/2006/main">
-  <p:cSld>
-    <p:spTree>
-      <p:nvGrpSpPr>
-        <p:cNvPr id="1" name=""/>
-        <p:cNvGrpSpPr/>
-        <p:nvPr/>
-      </p:nvGrpSpPr>
-      <p:grpSpPr>
-        <a:xfrm>
-          <a:off x="0" y="0"/>
-          <a:ext cx="0" cy="0"/>
-          <a:chOff x="0" y="0"/>
-          <a:chExt cx="0" cy="0"/>
-        </a:xfrm>
-      </p:grpSpPr>
-      <p:sp>
-        <p:nvSpPr>
-          <p:cNvPr id="2" name="Title 1"/>
-          <p:cNvSpPr>
-            <a:spLocks noGrp="1"/>
-          </p:cNvSpPr>
-          <p:nvPr>
-            <p:ph type="title"/>
-          </p:nvPr>
-        </p:nvSpPr>
-        <p:spPr/>
-        <p:txBody>
-          <a:bodyPr/>
-          <a:lstStyle/>
-          <a:p>
-            <a:pPr lvl="0" indent="0" marL="0">
-              <a:buNone/>
-            </a:pPr>
-            <a:r>
-              <a:rPr/>
-              <a:t>Overview</a:t>
-            </a:r>
-          </a:p>
-        </p:txBody>
-      </p:sp>
-      <p:sp>
-        <p:nvSpPr>
-          <p:cNvPr id="3" name="Content Placeholder 2"/>
-          <p:cNvSpPr>
-            <a:spLocks noGrp="1"/>
-          </p:cNvSpPr>
-          <p:nvPr>
-            <p:ph idx="1"/>
-          </p:nvPr>
-        </p:nvSpPr>
-        <p:spPr/>
-        <p:txBody>
-          <a:bodyPr/>
-          <a:lstStyle/>
-          <a:p>
-            <a:pPr lvl="0"/>
-            <a:r>
-              <a:rPr/>
-              <a:t>Simulator lab exercises (SIM LABS) support Thermodynamics and Thermal Power Plant Simulator (TPPS) courses</a:t>
-            </a:r>
-          </a:p>
-          <a:p>
-            <a:pPr lvl="0"/>
-            <a:r>
-              <a:rPr/>
-              <a:t>Built on Kongsberg’s TPPS platform</a:t>
-            </a:r>
-          </a:p>
-          <a:p>
-            <a:pPr lvl="0"/>
-            <a:r>
-              <a:rPr/>
-              <a:t>This session presents a selection of SIM LABS developed for classroom and lab use</a:t>
-            </a:r>
-          </a:p>
-        </p:txBody>
-      </p:sp>
-    </p:spTree>
-  </p:cSld>
-</p:sld>
-</file>
-
-<file path=ppt/slides/slide20.xml><?xml version="1.0" encoding="utf-8"?>
-<p:sld xmlns:a="http://schemas.openxmlformats.org/drawingml/2006/main" xmlns:r="http://schemas.openxmlformats.org/officeDocument/2006/relationships" xmlns:p="http://schemas.openxmlformats.org/presentationml/2006/main">
-  <p:cSld>
-    <p:spTree>
-      <p:nvGrpSpPr>
-        <p:cNvPr id="1" name=""/>
-        <p:cNvGrpSpPr/>
-        <p:nvPr/>
-      </p:nvGrpSpPr>
-      <p:grpSpPr>
-        <a:xfrm>
-          <a:off x="0" y="0"/>
-          <a:ext cx="0" cy="0"/>
-          <a:chOff x="0" y="0"/>
-          <a:chExt cx="0" cy="0"/>
-        </a:xfrm>
-      </p:grpSpPr>
-      <p:sp>
-        <p:nvSpPr>
-          <p:cNvPr id="2" name="Title 1"/>
-          <p:cNvSpPr>
-            <a:spLocks noGrp="1"/>
-          </p:cNvSpPr>
-          <p:nvPr>
-            <p:ph type="title"/>
-          </p:nvPr>
-        </p:nvSpPr>
-        <p:spPr/>
-        <p:txBody>
-          <a:bodyPr/>
-          <a:lstStyle/>
-          <a:p>
-            <a:pPr lvl="0" indent="0" marL="0">
-              <a:buNone/>
-            </a:pPr>
-            <a:r>
-              <a:rPr/>
-              <a:t>Q&amp;A</a:t>
-            </a:r>
-          </a:p>
-        </p:txBody>
-      </p:sp>
-    </p:spTree>
-  </p:cSld>
-</p:sld>
-</file>
-
-<file path=ppt/slides/slide3.xml><?xml version="1.0" encoding="utf-8"?>
-<p:sld xmlns:a="http://schemas.openxmlformats.org/drawingml/2006/main" xmlns:r="http://schemas.openxmlformats.org/officeDocument/2006/relationships" xmlns:p="http://schemas.openxmlformats.org/presentationml/2006/main">
-  <p:cSld>
-    <p:spTree>
-      <p:nvGrpSpPr>
-        <p:cNvPr id="1" name=""/>
-        <p:cNvGrpSpPr/>
-        <p:nvPr/>
-      </p:nvGrpSpPr>
-      <p:grpSpPr>
-        <a:xfrm>
-          <a:off x="0" y="0"/>
-          <a:ext cx="0" cy="0"/>
-          <a:chOff x="0" y="0"/>
-          <a:chExt cx="0" cy="0"/>
-        </a:xfrm>
-      </p:grpSpPr>
-      <p:sp>
-        <p:nvSpPr>
-          <p:cNvPr id="2" name="Title 1"/>
-          <p:cNvSpPr>
-            <a:spLocks noGrp="1"/>
-          </p:cNvSpPr>
-          <p:nvPr>
-            <p:ph type="title"/>
-          </p:nvPr>
-        </p:nvSpPr>
-        <p:spPr/>
-        <p:txBody>
-          <a:bodyPr/>
-          <a:lstStyle/>
-          <a:p>
-            <a:pPr lvl="0" indent="0" marL="0">
-              <a:buNone/>
-            </a:pPr>
-            <a:r>
-              <a:rPr/>
-              <a:t>The Challenge</a:t>
-            </a:r>
-          </a:p>
-        </p:txBody>
-      </p:sp>
-      <p:sp>
-        <p:nvSpPr>
-          <p:cNvPr id="3" name="Content Placeholder 2"/>
-          <p:cNvSpPr>
-            <a:spLocks noGrp="1"/>
-          </p:cNvSpPr>
-          <p:nvPr>
-            <p:ph idx="1"/>
-          </p:nvPr>
-        </p:nvSpPr>
-        <p:spPr/>
-        <p:txBody>
-          <a:bodyPr/>
-          <a:lstStyle/>
-          <a:p>
-            <a:pPr lvl="0"/>
-            <a:r>
-              <a:rPr/>
-              <a:t>Power Engineering students often struggle with theoretical concepts</a:t>
-            </a:r>
-          </a:p>
-          <a:p>
-            <a:pPr lvl="0"/>
-            <a:r>
-              <a:rPr/>
-              <a:t>Instructors face limited instructional time to cover both theory and practice</a:t>
-            </a:r>
-          </a:p>
-          <a:p>
-            <a:pPr lvl="0"/>
-            <a:r>
-              <a:rPr/>
-              <a:t>A gap remains between classroom theory and hands on plant operation</a:t>
-            </a:r>
-          </a:p>
-        </p:txBody>
-      </p:sp>
-    </p:spTree>
-  </p:cSld>
-</p:sld>
-</file>
-
-<file path=ppt/slides/slide4.xml><?xml version="1.0" encoding="utf-8"?>
-<p:sld xmlns:a="http://schemas.openxmlformats.org/drawingml/2006/main" xmlns:r="http://schemas.openxmlformats.org/officeDocument/2006/relationships" xmlns:p="http://schemas.openxmlformats.org/presentationml/2006/main">
-  <p:cSld>
-    <p:spTree>
-      <p:nvGrpSpPr>
-        <p:cNvPr id="1" name=""/>
-        <p:cNvGrpSpPr/>
-        <p:nvPr/>
-      </p:nvGrpSpPr>
-      <p:grpSpPr>
-        <a:xfrm>
-          <a:off x="0" y="0"/>
-          <a:ext cx="0" cy="0"/>
-          <a:chOff x="0" y="0"/>
-          <a:chExt cx="0" cy="0"/>
-        </a:xfrm>
-      </p:grpSpPr>
-      <p:sp>
-        <p:nvSpPr>
-          <p:cNvPr id="2" name="Title 1"/>
-          <p:cNvSpPr>
-            <a:spLocks noGrp="1"/>
-          </p:cNvSpPr>
-          <p:nvPr>
-            <p:ph type="title"/>
-          </p:nvPr>
-        </p:nvSpPr>
-        <p:spPr/>
-        <p:txBody>
-          <a:bodyPr/>
-          <a:lstStyle/>
-          <a:p>
-            <a:pPr lvl="0" indent="0" marL="0">
-              <a:buNone/>
-            </a:pPr>
-            <a:r>
-              <a:rPr/>
-              <a:t>How SIM LABS Help</a:t>
-            </a:r>
-          </a:p>
-        </p:txBody>
-      </p:sp>
-      <p:sp>
-        <p:nvSpPr>
-          <p:cNvPr id="3" name="Content Placeholder 2"/>
-          <p:cNvSpPr>
-            <a:spLocks noGrp="1"/>
-          </p:cNvSpPr>
-          <p:nvPr>
-            <p:ph idx="1"/>
-          </p:nvPr>
-        </p:nvSpPr>
-        <p:spPr/>
-        <p:txBody>
-          <a:bodyPr/>
-          <a:lstStyle/>
-          <a:p>
-            <a:pPr lvl="0"/>
-            <a:r>
-              <a:rPr/>
-              <a:t>Strengthen understanding of core ThermoFluids principles</a:t>
-            </a:r>
-          </a:p>
-          <a:p>
-            <a:pPr lvl="0"/>
-            <a:r>
-              <a:rPr/>
-              <a:t>Support application of theory in realistic operational contexts</a:t>
-            </a:r>
-          </a:p>
-          <a:p>
-            <a:pPr lvl="0"/>
-            <a:r>
-              <a:rPr/>
-              <a:t>Allow students to visualize processes and explore system behaviour</a:t>
-            </a:r>
-          </a:p>
-          <a:p>
-            <a:pPr lvl="0"/>
-            <a:r>
-              <a:rPr/>
-              <a:t>Build cause and effect connections between operating parameters and outcomes</a:t>
-            </a:r>
-          </a:p>
-        </p:txBody>
-      </p:sp>
-    </p:spTree>
-  </p:cSld>
-</p:sld>
-</file>
-
-<file path=ppt/slides/slide5.xml><?xml version="1.0" encoding="utf-8"?>
-<p:sld xmlns:a="http://schemas.openxmlformats.org/drawingml/2006/main" xmlns:r="http://schemas.openxmlformats.org/officeDocument/2006/relationships" xmlns:p="http://schemas.openxmlformats.org/presentationml/2006/main">
-  <p:cSld>
-    <p:spTree>
-      <p:nvGrpSpPr>
-        <p:cNvPr id="1" name=""/>
-        <p:cNvGrpSpPr/>
-        <p:nvPr/>
-      </p:nvGrpSpPr>
-      <p:grpSpPr>
-        <a:xfrm>
-          <a:off x="0" y="0"/>
-          <a:ext cx="0" cy="0"/>
-          <a:chOff x="0" y="0"/>
-          <a:chExt cx="0" cy="0"/>
-        </a:xfrm>
-      </p:grpSpPr>
-      <p:sp>
-        <p:nvSpPr>
-          <p:cNvPr id="2" name="Title 1"/>
-          <p:cNvSpPr>
-            <a:spLocks noGrp="1"/>
-          </p:cNvSpPr>
-          <p:nvPr>
-            <p:ph type="title"/>
-          </p:nvPr>
-        </p:nvSpPr>
-        <p:spPr/>
-        <p:txBody>
-          <a:bodyPr/>
-          <a:lstStyle/>
-          <a:p>
-            <a:pPr lvl="0" indent="0" marL="0">
-              <a:buNone/>
-            </a:pPr>
-            <a:r>
-              <a:rPr/>
-              <a:t>Learning Benefits</a:t>
-            </a:r>
-          </a:p>
-        </p:txBody>
-      </p:sp>
-      <p:sp>
-        <p:nvSpPr>
-          <p:cNvPr id="3" name="Content Placeholder 2"/>
-          <p:cNvSpPr>
-            <a:spLocks noGrp="1"/>
-          </p:cNvSpPr>
-          <p:nvPr>
-            <p:ph idx="1"/>
-          </p:nvPr>
-        </p:nvSpPr>
-        <p:spPr/>
-        <p:txBody>
-          <a:bodyPr/>
-          <a:lstStyle/>
-          <a:p>
-            <a:pPr lvl="0"/>
-            <a:r>
-              <a:rPr/>
-              <a:t>Enhance conceptual comprehension</a:t>
-            </a:r>
-          </a:p>
-          <a:p>
-            <a:pPr lvl="0"/>
-            <a:r>
-              <a:rPr/>
-              <a:t>Prepare learners for hands on work with real equipment in a physical plant</a:t>
-            </a:r>
-          </a:p>
-          <a:p>
-            <a:pPr lvl="0"/>
-            <a:r>
-              <a:rPr/>
-              <a:t>Reinforce safe operational practices</a:t>
-            </a:r>
-          </a:p>
-          <a:p>
-            <a:pPr lvl="0"/>
-            <a:r>
-              <a:rPr/>
-              <a:t>Build environmental awareness within steam plant systems</a:t>
-            </a:r>
-          </a:p>
-        </p:txBody>
-      </p:sp>
-    </p:spTree>
-  </p:cSld>
-</p:sld>
-</file>
-
-<file path=ppt/slides/slide6.xml><?xml version="1.0" encoding="utf-8"?>
-<p:sld xmlns:a="http://schemas.openxmlformats.org/drawingml/2006/main" xmlns:r="http://schemas.openxmlformats.org/officeDocument/2006/relationships" xmlns:p="http://schemas.openxmlformats.org/presentationml/2006/main">
-  <p:cSld>
-    <p:spTree>
-      <p:nvGrpSpPr>
-        <p:cNvPr id="1" name=""/>
-        <p:cNvGrpSpPr/>
-        <p:nvPr/>
-      </p:nvGrpSpPr>
-      <p:grpSpPr>
-        <a:xfrm>
-          <a:off x="0" y="0"/>
-          <a:ext cx="0" cy="0"/>
-          <a:chOff x="0" y="0"/>
-          <a:chExt cx="0" cy="0"/>
-        </a:xfrm>
-      </p:grpSpPr>
-      <p:sp>
-        <p:nvSpPr>
-          <p:cNvPr id="2" name="Title 1"/>
-          <p:cNvSpPr>
-            <a:spLocks noGrp="1"/>
-          </p:cNvSpPr>
-          <p:nvPr>
-            <p:ph type="title"/>
-          </p:nvPr>
-        </p:nvSpPr>
-        <p:spPr/>
-        <p:txBody>
-          <a:bodyPr/>
-          <a:lstStyle/>
-          <a:p>
-            <a:pPr lvl="0" indent="0" marL="0">
-              <a:buNone/>
-            </a:pPr>
-            <a:r>
-              <a:rPr/>
-              <a:t>SIM LABS Featured in This Session</a:t>
-            </a:r>
-          </a:p>
-        </p:txBody>
-      </p:sp>
-      <p:sp>
-        <p:nvSpPr>
-          <p:cNvPr id="3" name="Content Placeholder 2"/>
-          <p:cNvSpPr>
-            <a:spLocks noGrp="1"/>
-          </p:cNvSpPr>
-          <p:nvPr>
-            <p:ph idx="1"/>
-          </p:nvPr>
-        </p:nvSpPr>
-        <p:spPr/>
-        <p:txBody>
-          <a:bodyPr/>
-          <a:lstStyle/>
-          <a:p>
-            <a:pPr lvl="0"/>
-            <a:r>
-              <a:rPr/>
-              <a:t>Boiler Efficiency</a:t>
-            </a:r>
-          </a:p>
-          <a:p>
-            <a:pPr lvl="0"/>
-            <a:r>
-              <a:rPr/>
-              <a:t>Turbine Efficiency</a:t>
-            </a:r>
-          </a:p>
-          <a:p>
-            <a:pPr lvl="0"/>
-            <a:r>
-              <a:rPr/>
-              <a:t>Power Plant Efficiency</a:t>
-            </a:r>
-          </a:p>
-          <a:p>
-            <a:pPr lvl="0"/>
-            <a:r>
-              <a:rPr/>
-              <a:t>NOx Emissions</a:t>
-            </a:r>
-          </a:p>
-          <a:p>
-            <a:pPr lvl="0"/>
-            <a:r>
-              <a:rPr/>
-              <a:t>Heat Exchangers</a:t>
-            </a:r>
-          </a:p>
-          <a:p>
-            <a:pPr lvl="0"/>
-            <a:r>
-              <a:rPr/>
-              <a:t>Combustion Analysis</a:t>
-            </a:r>
-          </a:p>
-        </p:txBody>
-      </p:sp>
-    </p:spTree>
-  </p:cSld>
-</p:sld>
-</file>
-
-<file path=ppt/slides/slide7.xml><?xml version="1.0" encoding="utf-8"?>
-<p:sld xmlns:a="http://schemas.openxmlformats.org/drawingml/2006/main" xmlns:r="http://schemas.openxmlformats.org/officeDocument/2006/relationships" xmlns:p="http://schemas.openxmlformats.org/presentationml/2006/main">
-  <p:cSld>
-    <p:spTree>
-      <p:nvGrpSpPr>
-        <p:cNvPr id="1" name=""/>
-        <p:cNvGrpSpPr/>
-        <p:nvPr/>
-      </p:nvGrpSpPr>
-      <p:grpSpPr>
-        <a:xfrm>
-          <a:off x="0" y="0"/>
-          <a:ext cx="0" cy="0"/>
-          <a:chOff x="0" y="0"/>
-          <a:chExt cx="0" cy="0"/>
-        </a:xfrm>
-      </p:grpSpPr>
-      <p:sp>
-        <p:nvSpPr>
-          <p:cNvPr id="2" name="Title 1"/>
-          <p:cNvSpPr>
-            <a:spLocks noGrp="1"/>
-          </p:cNvSpPr>
-          <p:nvPr>
-            <p:ph type="title"/>
-          </p:nvPr>
-        </p:nvSpPr>
-        <p:spPr/>
-        <p:txBody>
-          <a:bodyPr/>
-          <a:lstStyle/>
-          <a:p>
-            <a:pPr lvl="0" indent="0" marL="0">
-              <a:buNone/>
-            </a:pPr>
-            <a:r>
-              <a:rPr/>
-              <a:t>Boiler Efficiency: Objective and Theory</a:t>
-            </a:r>
-          </a:p>
-        </p:txBody>
-      </p:sp>
-      <mc:AlternateContent xmlns:mc="http://schemas.openxmlformats.org/markup-compatibility/2006">
-        <mc:Choice xmlns:a14="http://schemas.microsoft.com/office/drawing/2010/main" Requires="a14">
-          <p:sp>
-            <p:nvSpPr>
-              <p:cNvPr id="3" name="Content Placeholder 2"/>
-              <p:cNvSpPr>
-                <a:spLocks noGrp="1"/>
-              </p:cNvSpPr>
-              <p:nvPr>
-                <p:ph idx="1"/>
-              </p:nvPr>
-            </p:nvSpPr>
-            <p:spPr/>
-            <p:txBody>
-              <a:bodyPr/>
-              <a:lstStyle/>
-              <a:p>
-                <a:pPr lvl="0"/>
-                <a:r>
-                  <a:rPr/>
-                  <a:t>Operate the plant in four modes and compute boiler thermal efficiency: 230 MW burning HFO, 80% load burning biofuel, 80% load burning coal, and 80% load burning coal with soot buildup</a:t>
-                </a:r>
-              </a:p>
-              <a:p>
-                <a:pPr lvl="0"/>
-                <a:r>
-                  <a:rPr/>
-                  <a:t>Boiler thermal efficiency is the ratio of energy to steam over energy from fuel</a:t>
-                </a:r>
-              </a:p>
-              <a:p>
-                <a:pPr lvl="0" indent="0" marL="0">
-                  <a:buNone/>
-                </a:pPr>
-                <a14:m>
-                  <m:oMathPara xmlns:m="http://schemas.openxmlformats.org/officeDocument/2006/math">
-                    <m:oMathParaPr>
-                      <m:jc m:val="center"/>
-                    </m:oMathParaPr>
-                    <m:oMath>
-                      <m:sSub>
-                        <m:e>
-                          <m:r>
-                            <m:t>η</m:t>
-                          </m:r>
-                        </m:e>
-                        <m:sub>
-                          <m:r>
-                            <m:rPr>
-                              <m:nor/>
-                              <m:sty m:val="p"/>
-                            </m:rPr>
-                            <m:t>boiler</m:t>
-                          </m:r>
-                        </m:sub>
-                      </m:sSub>
-                      <m:r>
-                        <m:rPr>
-                          <m:sty m:val="p"/>
-                        </m:rPr>
-                        <m:t>=</m:t>
-                      </m:r>
-                      <m:f>
-                        <m:fPr>
-                          <m:type m:val="bar"/>
-                        </m:fPr>
-                        <m:num>
-                          <m:sSub>
-                            <m:e>
-                              <m:r>
-                                <m:t>m</m:t>
-                              </m:r>
-                            </m:e>
-                            <m:sub>
-                              <m:r>
-                                <m:t>s</m:t>
-                              </m:r>
-                            </m:sub>
-                          </m:sSub>
-                          <m:r>
-                            <m:rPr>
-                              <m:sty m:val="p"/>
-                            </m:rPr>
-                            <m:t>(</m:t>
-                          </m:r>
-                          <m:sSub>
-                            <m:e>
-                              <m:r>
-                                <m:t>h</m:t>
-                              </m:r>
-                            </m:e>
-                            <m:sub>
-                              <m:r>
-                                <m:t>2</m:t>
-                              </m:r>
-                            </m:sub>
-                          </m:sSub>
-                          <m:r>
-                            <m:rPr>
-                              <m:sty m:val="p"/>
-                            </m:rPr>
-                            <m:t>−</m:t>
-                          </m:r>
-                          <m:sSub>
-                            <m:e>
-                              <m:r>
-                                <m:t>h</m:t>
-                              </m:r>
-                            </m:e>
-                            <m:sub>
-                              <m:r>
-                                <m:t>1</m:t>
-                              </m:r>
-                            </m:sub>
-                          </m:sSub>
-                          <m:r>
-                            <m:rPr>
-                              <m:sty m:val="p"/>
-                            </m:rPr>
-                            <m:t>)</m:t>
-                          </m:r>
-                        </m:num>
-                        <m:den>
-                          <m:sSub>
-                            <m:e>
-                              <m:r>
-                                <m:t>m</m:t>
-                              </m:r>
-                            </m:e>
-                            <m:sub>
-                              <m:r>
-                                <m:t>f</m:t>
-                              </m:r>
-                            </m:sub>
-                          </m:sSub>
-                          <m:r>
-                            <m:t>H</m:t>
-                          </m:r>
-                          <m:r>
-                            <m:t>V</m:t>
-                          </m:r>
-                        </m:den>
-                      </m:f>
-                      <m:r>
-                        <m:rPr>
-                          <m:sty m:val="p"/>
-                        </m:rPr>
-                        <m:t>×</m:t>
-                      </m:r>
-                      <m:r>
-                        <m:t>100</m:t>
-                      </m:r>
-                      <m:r>
-                        <m:rPr>
-                          <m:sty m:val="p"/>
-                        </m:rPr>
-                        <m:t>%</m:t>
-                      </m:r>
-                    </m:oMath>
-                  </m:oMathPara>
-                </a14:m>
-              </a:p>
-            </p:txBody>
-          </p:sp>
-        </mc:Choice>
-      </mc:AlternateContent>
-    </p:spTree>
-  </p:cSld>
-</p:sld>
-</file>
-
-<file path=ppt/slides/slide8.xml><?xml version="1.0" encoding="utf-8"?>
-<p:sld xmlns:a="http://schemas.openxmlformats.org/drawingml/2006/main" xmlns:r="http://schemas.openxmlformats.org/officeDocument/2006/relationships" xmlns:p="http://schemas.openxmlformats.org/presentationml/2006/main">
-  <p:cSld>
-    <p:spTree>
-      <p:nvGrpSpPr>
-        <p:cNvPr id="1" name=""/>
-        <p:cNvGrpSpPr/>
-        <p:nvPr/>
-      </p:nvGrpSpPr>
-      <p:grpSpPr>
-        <a:xfrm>
-          <a:off x="0" y="0"/>
-          <a:ext cx="0" cy="0"/>
-          <a:chOff x="0" y="0"/>
-          <a:chExt cx="0" cy="0"/>
-        </a:xfrm>
-      </p:grpSpPr>
-      <p:sp>
-        <p:nvSpPr>
-          <p:cNvPr id="2" name="Title 1"/>
-          <p:cNvSpPr>
-            <a:spLocks noGrp="1"/>
-          </p:cNvSpPr>
-          <p:nvPr>
-            <p:ph type="title"/>
-          </p:nvPr>
-        </p:nvSpPr>
-        <p:spPr/>
-        <p:txBody>
-          <a:bodyPr/>
-          <a:lstStyle/>
-          <a:p>
-            <a:pPr lvl="0" indent="0" marL="0">
-              <a:buNone/>
-            </a:pPr>
-            <a:r>
-              <a:rPr/>
-              <a:t>Boiler Efficiency: Lab and Deliverables</a:t>
-            </a:r>
-          </a:p>
-        </p:txBody>
-      </p:sp>
-      <p:sp>
-        <p:nvSpPr>
-          <p:cNvPr id="3" name="Content Placeholder 2"/>
-          <p:cNvSpPr>
-            <a:spLocks noGrp="1"/>
-          </p:cNvSpPr>
-          <p:nvPr>
-            <p:ph idx="1"/>
-          </p:nvPr>
-        </p:nvSpPr>
-        <p:spPr/>
-        <p:txBody>
-          <a:bodyPr/>
-          <a:lstStyle/>
-          <a:p>
-            <a:pPr lvl="0"/>
-            <a:r>
-              <a:rPr/>
-              <a:t>Four initial conditions: I10, I15, I14 (coal), and I14 with soot configured via MD250</a:t>
-            </a:r>
-          </a:p>
-          <a:p>
-            <a:pPr lvl="0"/>
-            <a:r>
-              <a:rPr/>
-              <a:t>Log HFO, pellet, and coal heating value tags, then use steam tables to find enthalpy values</a:t>
-            </a:r>
-          </a:p>
-          <a:p>
-            <a:pPr lvl="0"/>
-            <a:r>
-              <a:rPr/>
-              <a:t>Deliverables: trend plots for all four conditions, efficiency computations, and a conclusion comparing results</a:t>
-            </a:r>
-          </a:p>
-        </p:txBody>
-      </p:sp>
-    </p:spTree>
-  </p:cSld>
-</p:sld>
-</file>
-
-<file path=ppt/slides/slide9.xml><?xml version="1.0" encoding="utf-8"?>
-<p:sld xmlns:a="http://schemas.openxmlformats.org/drawingml/2006/main" xmlns:r="http://schemas.openxmlformats.org/officeDocument/2006/relationships" xmlns:p="http://schemas.openxmlformats.org/presentationml/2006/main">
-  <p:cSld>
-    <p:spTree>
-      <p:nvGrpSpPr>
-        <p:cNvPr id="1" name=""/>
-        <p:cNvGrpSpPr/>
-        <p:nvPr/>
-      </p:nvGrpSpPr>
-      <p:grpSpPr>
-        <a:xfrm>
-          <a:off x="0" y="0"/>
-          <a:ext cx="0" cy="0"/>
-          <a:chOff x="0" y="0"/>
-          <a:chExt cx="0" cy="0"/>
-        </a:xfrm>
-      </p:grpSpPr>
-      <p:sp>
-        <p:nvSpPr>
-          <p:cNvPr id="2" name="Title 1"/>
-          <p:cNvSpPr>
-            <a:spLocks noGrp="1"/>
-          </p:cNvSpPr>
-          <p:nvPr>
-            <p:ph type="title"/>
-          </p:nvPr>
-        </p:nvSpPr>
-        <p:spPr/>
-        <p:txBody>
-          <a:bodyPr/>
-          <a:lstStyle/>
-          <a:p>
-            <a:pPr lvl="0" indent="0" marL="0">
-              <a:buNone/>
-            </a:pPr>
-            <a:r>
-              <a:rPr/>
-              <a:t>Turbine Efficiency: Objective and Theory</a:t>
+              <a:t>Objective and Theory</a:t>
             </a:r>
           </a:p>
         </p:txBody>
@@ -5546,6 +5234,3089 @@
                   <a:rPr/>
                   <a:t>A higher pressure drop in a single stage increases the reheat factor and lowers efficiency, which is why multi-stage turbines with reheat perform better</a:t>
                 </a:r>
+              </a:p>
+            </p:txBody>
+          </p:sp>
+        </mc:Choice>
+      </mc:AlternateContent>
+    </p:spTree>
+  </p:cSld>
+</p:sld>
+</file>
+
+<file path=ppt/slides/slide18.xml><?xml version="1.0" encoding="utf-8"?>
+<p:sld xmlns:a="http://schemas.openxmlformats.org/drawingml/2006/main" xmlns:r="http://schemas.openxmlformats.org/officeDocument/2006/relationships" xmlns:p="http://schemas.openxmlformats.org/presentationml/2006/main">
+  <p:cSld>
+    <p:spTree>
+      <p:nvGrpSpPr>
+        <p:cNvPr id="1" name=""/>
+        <p:cNvGrpSpPr/>
+        <p:nvPr/>
+      </p:nvGrpSpPr>
+      <p:grpSpPr>
+        <a:xfrm>
+          <a:off x="0" y="0"/>
+          <a:ext cx="0" cy="0"/>
+          <a:chOff x="0" y="0"/>
+          <a:chExt cx="0" cy="0"/>
+        </a:xfrm>
+      </p:grpSpPr>
+      <p:sp>
+        <p:nvSpPr>
+          <p:cNvPr id="2" name="Title 1"/>
+          <p:cNvSpPr>
+            <a:spLocks noGrp="1"/>
+          </p:cNvSpPr>
+          <p:nvPr>
+            <p:ph type="title"/>
+          </p:nvPr>
+        </p:nvSpPr>
+        <p:spPr/>
+        <p:txBody>
+          <a:bodyPr/>
+          <a:lstStyle/>
+          <a:p>
+            <a:pPr lvl="0" indent="0" marL="0">
+              <a:buNone/>
+            </a:pPr>
+            <a:r>
+              <a:rPr/>
+              <a:t>h-s Diagram</a:t>
+            </a:r>
+          </a:p>
+        </p:txBody>
+      </p:sp>
+      <p:pic>
+        <p:nvPicPr>
+          <p:cNvPr descr="figures/h-s.png" id="0" name="Picture 1"/>
+          <p:cNvPicPr>
+            <a:picLocks noGrp="1" noChangeAspect="1"/>
+          </p:cNvPicPr>
+          <p:nvPr/>
+        </p:nvPicPr>
+        <p:blipFill>
+          <a:blip r:embed="rId2"/>
+          <a:stretch>
+            <a:fillRect/>
+          </a:stretch>
+        </p:blipFill>
+        <p:spPr bwMode="auto">
+          <a:xfrm>
+            <a:off x="2768600" y="1193800"/>
+            <a:ext cx="3619500" cy="2882900"/>
+          </a:xfrm>
+          <a:prstGeom prst="rect">
+            <a:avLst/>
+          </a:prstGeom>
+          <a:noFill/>
+          <a:ln w="9525">
+            <a:noFill/>
+            <a:headEnd/>
+            <a:tailEnd/>
+          </a:ln>
+        </p:spPr>
+      </p:pic>
+      <p:sp>
+        <p:nvSpPr>
+          <p:cNvPr id="1" name="TextBox 3"/>
+          <p:cNvSpPr txBox="1"/>
+          <p:nvPr>
+            <p:ph idx="1"/>
+          </p:nvPr>
+        </p:nvSpPr>
+        <p:spPr>
+          <a:xfrm>
+            <a:off x="457200" y="4076700"/>
+            <a:ext cx="8229600" cy="508000"/>
+          </a:xfrm>
+          <a:prstGeom prst="rect">
+            <a:avLst/>
+          </a:prstGeom>
+          <a:noFill/>
+        </p:spPr>
+        <p:txBody>
+          <a:bodyPr/>
+          <a:lstStyle/>
+          <a:p>
+            <a:pPr lvl="0" indent="0" marL="0" algn="ctr">
+              <a:buNone/>
+            </a:pPr>
+            <a:r>
+              <a:rPr/>
+              <a:t>Turbine Efficiency.</a:t>
+            </a:r>
+          </a:p>
+        </p:txBody>
+      </p:sp>
+    </p:spTree>
+  </p:cSld>
+</p:sld>
+</file>
+
+<file path=ppt/slides/slide19.xml><?xml version="1.0" encoding="utf-8"?>
+<p:sld xmlns:a="http://schemas.openxmlformats.org/drawingml/2006/main" xmlns:r="http://schemas.openxmlformats.org/officeDocument/2006/relationships" xmlns:p="http://schemas.openxmlformats.org/presentationml/2006/main">
+  <p:cSld>
+    <p:spTree>
+      <p:nvGrpSpPr>
+        <p:cNvPr id="1" name=""/>
+        <p:cNvGrpSpPr/>
+        <p:nvPr/>
+      </p:nvGrpSpPr>
+      <p:grpSpPr>
+        <a:xfrm>
+          <a:off x="0" y="0"/>
+          <a:ext cx="0" cy="0"/>
+          <a:chOff x="0" y="0"/>
+          <a:chExt cx="0" cy="0"/>
+        </a:xfrm>
+      </p:grpSpPr>
+      <p:sp>
+        <p:nvSpPr>
+          <p:cNvPr id="2" name="Title 1"/>
+          <p:cNvSpPr>
+            <a:spLocks noGrp="1"/>
+          </p:cNvSpPr>
+          <p:nvPr>
+            <p:ph type="title"/>
+          </p:nvPr>
+        </p:nvSpPr>
+        <p:spPr/>
+        <p:txBody>
+          <a:bodyPr/>
+          <a:lstStyle/>
+          <a:p>
+            <a:pPr lvl="0" indent="0" marL="0">
+              <a:buNone/>
+            </a:pPr>
+            <a:r>
+              <a:rPr/>
+              <a:t>Turbine Efficiency: 101 MW Sample</a:t>
+            </a:r>
+          </a:p>
+        </p:txBody>
+      </p:sp>
+      <p:pic>
+        <p:nvPicPr>
+          <p:cNvPr descr="figures/101MW.png" id="0" name="Picture 1"/>
+          <p:cNvPicPr>
+            <a:picLocks noGrp="1" noChangeAspect="1"/>
+          </p:cNvPicPr>
+          <p:nvPr/>
+        </p:nvPicPr>
+        <p:blipFill>
+          <a:blip r:embed="rId2"/>
+          <a:stretch>
+            <a:fillRect/>
+          </a:stretch>
+        </p:blipFill>
+        <p:spPr bwMode="auto">
+          <a:xfrm>
+            <a:off x="1651000" y="1193800"/>
+            <a:ext cx="5842000" cy="2882900"/>
+          </a:xfrm>
+          <a:prstGeom prst="rect">
+            <a:avLst/>
+          </a:prstGeom>
+          <a:noFill/>
+          <a:ln w="9525">
+            <a:noFill/>
+            <a:headEnd/>
+            <a:tailEnd/>
+          </a:ln>
+        </p:spPr>
+      </p:pic>
+      <p:sp>
+        <p:nvSpPr>
+          <p:cNvPr id="1" name="TextBox 3"/>
+          <p:cNvSpPr txBox="1"/>
+          <p:nvPr>
+            <p:ph idx="1"/>
+          </p:nvPr>
+        </p:nvSpPr>
+        <p:spPr>
+          <a:xfrm>
+            <a:off x="457200" y="4076700"/>
+            <a:ext cx="8229600" cy="508000"/>
+          </a:xfrm>
+          <a:prstGeom prst="rect">
+            <a:avLst/>
+          </a:prstGeom>
+          <a:noFill/>
+        </p:spPr>
+        <p:txBody>
+          <a:bodyPr/>
+          <a:lstStyle/>
+          <a:p>
+            <a:pPr lvl="0" indent="0" marL="0" algn="ctr">
+              <a:buNone/>
+            </a:pPr>
+            <a:r>
+              <a:rPr/>
+              <a:t>I09 E23356: 101.05 MW</a:t>
+            </a:r>
+          </a:p>
+        </p:txBody>
+      </p:sp>
+    </p:spTree>
+  </p:cSld>
+</p:sld>
+</file>
+
+<file path=ppt/slides/slide2.xml><?xml version="1.0" encoding="utf-8"?>
+<p:sld xmlns:a="http://schemas.openxmlformats.org/drawingml/2006/main" xmlns:r="http://schemas.openxmlformats.org/officeDocument/2006/relationships" xmlns:p="http://schemas.openxmlformats.org/presentationml/2006/main">
+  <p:cSld>
+    <p:spTree>
+      <p:nvGrpSpPr>
+        <p:cNvPr id="1" name=""/>
+        <p:cNvGrpSpPr/>
+        <p:nvPr/>
+      </p:nvGrpSpPr>
+      <p:grpSpPr>
+        <a:xfrm>
+          <a:off x="0" y="0"/>
+          <a:ext cx="0" cy="0"/>
+          <a:chOff x="0" y="0"/>
+          <a:chExt cx="0" cy="0"/>
+        </a:xfrm>
+      </p:grpSpPr>
+      <p:sp>
+        <p:nvSpPr>
+          <p:cNvPr id="2" name="Title 1"/>
+          <p:cNvSpPr>
+            <a:spLocks noGrp="1"/>
+          </p:cNvSpPr>
+          <p:nvPr>
+            <p:ph type="title"/>
+          </p:nvPr>
+        </p:nvSpPr>
+        <p:spPr/>
+        <p:txBody>
+          <a:bodyPr/>
+          <a:lstStyle/>
+          <a:p>
+            <a:pPr lvl="0" indent="0" marL="0">
+              <a:buNone/>
+            </a:pPr>
+            <a:r>
+              <a:rPr/>
+              <a:t>Overview</a:t>
+            </a:r>
+          </a:p>
+        </p:txBody>
+      </p:sp>
+      <p:sp>
+        <p:nvSpPr>
+          <p:cNvPr id="3" name="Content Placeholder 2"/>
+          <p:cNvSpPr>
+            <a:spLocks noGrp="1"/>
+          </p:cNvSpPr>
+          <p:nvPr>
+            <p:ph idx="1"/>
+          </p:nvPr>
+        </p:nvSpPr>
+        <p:spPr/>
+        <p:txBody>
+          <a:bodyPr/>
+          <a:lstStyle/>
+          <a:p>
+            <a:pPr lvl="0"/>
+            <a:r>
+              <a:rPr/>
+              <a:t>Simulator lab exercises (SIM LABS) support Thermodynamics and Thermal Power Plant Simulator (TPPS) courses</a:t>
+            </a:r>
+          </a:p>
+          <a:p>
+            <a:pPr lvl="0"/>
+            <a:r>
+              <a:rPr/>
+              <a:t>Built on Kongsberg’s TPPS platform</a:t>
+            </a:r>
+          </a:p>
+          <a:p>
+            <a:pPr lvl="0"/>
+            <a:r>
+              <a:rPr/>
+              <a:t>This session presents a selection of SIM LABS developed for classroom and lab use</a:t>
+            </a:r>
+          </a:p>
+        </p:txBody>
+      </p:sp>
+    </p:spTree>
+  </p:cSld>
+</p:sld>
+</file>
+
+<file path=ppt/slides/slide20.xml><?xml version="1.0" encoding="utf-8"?>
+<p:sld xmlns:a="http://schemas.openxmlformats.org/drawingml/2006/main" xmlns:r="http://schemas.openxmlformats.org/officeDocument/2006/relationships" xmlns:p="http://schemas.openxmlformats.org/presentationml/2006/main">
+  <p:cSld>
+    <p:spTree>
+      <p:nvGrpSpPr>
+        <p:cNvPr id="1" name=""/>
+        <p:cNvGrpSpPr/>
+        <p:nvPr/>
+      </p:nvGrpSpPr>
+      <p:grpSpPr>
+        <a:xfrm>
+          <a:off x="0" y="0"/>
+          <a:ext cx="0" cy="0"/>
+          <a:chOff x="0" y="0"/>
+          <a:chExt cx="0" cy="0"/>
+        </a:xfrm>
+      </p:grpSpPr>
+      <p:sp>
+        <p:nvSpPr>
+          <p:cNvPr id="2" name="Title 1"/>
+          <p:cNvSpPr>
+            <a:spLocks noGrp="1"/>
+          </p:cNvSpPr>
+          <p:nvPr>
+            <p:ph type="title"/>
+          </p:nvPr>
+        </p:nvSpPr>
+        <p:spPr/>
+        <p:txBody>
+          <a:bodyPr/>
+          <a:lstStyle/>
+          <a:p>
+            <a:pPr lvl="0" indent="0" marL="0">
+              <a:buNone/>
+            </a:pPr>
+            <a:r>
+              <a:rPr/>
+              <a:t>Turbine Efficiency: 250 MW Sample</a:t>
+            </a:r>
+          </a:p>
+        </p:txBody>
+      </p:sp>
+      <p:pic>
+        <p:nvPicPr>
+          <p:cNvPr descr="figures/250MW.png" id="0" name="Picture 1"/>
+          <p:cNvPicPr>
+            <a:picLocks noGrp="1" noChangeAspect="1"/>
+          </p:cNvPicPr>
+          <p:nvPr/>
+        </p:nvPicPr>
+        <p:blipFill>
+          <a:blip r:embed="rId2"/>
+          <a:stretch>
+            <a:fillRect/>
+          </a:stretch>
+        </p:blipFill>
+        <p:spPr bwMode="auto">
+          <a:xfrm>
+            <a:off x="1651000" y="1193800"/>
+            <a:ext cx="5842000" cy="2882900"/>
+          </a:xfrm>
+          <a:prstGeom prst="rect">
+            <a:avLst/>
+          </a:prstGeom>
+          <a:noFill/>
+          <a:ln w="9525">
+            <a:noFill/>
+            <a:headEnd/>
+            <a:tailEnd/>
+          </a:ln>
+        </p:spPr>
+      </p:pic>
+      <p:sp>
+        <p:nvSpPr>
+          <p:cNvPr id="1" name="TextBox 3"/>
+          <p:cNvSpPr txBox="1"/>
+          <p:nvPr>
+            <p:ph idx="1"/>
+          </p:nvPr>
+        </p:nvSpPr>
+        <p:spPr>
+          <a:xfrm>
+            <a:off x="457200" y="4076700"/>
+            <a:ext cx="8229600" cy="508000"/>
+          </a:xfrm>
+          <a:prstGeom prst="rect">
+            <a:avLst/>
+          </a:prstGeom>
+          <a:noFill/>
+        </p:spPr>
+        <p:txBody>
+          <a:bodyPr/>
+          <a:lstStyle/>
+          <a:p>
+            <a:pPr lvl="0" indent="0" marL="0" algn="ctr">
+              <a:buNone/>
+            </a:pPr>
+            <a:r>
+              <a:rPr/>
+              <a:t>I10 E23356: 249.86 MW</a:t>
+            </a:r>
+          </a:p>
+        </p:txBody>
+      </p:sp>
+    </p:spTree>
+  </p:cSld>
+</p:sld>
+</file>
+
+<file path=ppt/slides/slide21.xml><?xml version="1.0" encoding="utf-8"?>
+<p:sld xmlns:a="http://schemas.openxmlformats.org/drawingml/2006/main" xmlns:r="http://schemas.openxmlformats.org/officeDocument/2006/relationships" xmlns:p="http://schemas.openxmlformats.org/presentationml/2006/main">
+  <p:cSld>
+    <p:spTree>
+      <p:nvGrpSpPr>
+        <p:cNvPr id="1" name=""/>
+        <p:cNvGrpSpPr/>
+        <p:nvPr/>
+      </p:nvGrpSpPr>
+      <p:grpSpPr>
+        <a:xfrm>
+          <a:off x="0" y="0"/>
+          <a:ext cx="0" cy="0"/>
+          <a:chOff x="0" y="0"/>
+          <a:chExt cx="0" cy="0"/>
+        </a:xfrm>
+      </p:grpSpPr>
+      <p:sp>
+        <p:nvSpPr>
+          <p:cNvPr id="2" name="Title 1"/>
+          <p:cNvSpPr>
+            <a:spLocks noGrp="1"/>
+          </p:cNvSpPr>
+          <p:nvPr>
+            <p:ph type="title"/>
+          </p:nvPr>
+        </p:nvSpPr>
+        <p:spPr/>
+        <p:txBody>
+          <a:bodyPr/>
+          <a:lstStyle/>
+          <a:p>
+            <a:pPr lvl="0" indent="0" marL="0">
+              <a:buNone/>
+            </a:pPr>
+            <a:r>
+              <a:rPr/>
+              <a:t>HP Turbine Efficiency (Abbreviated)</a:t>
+            </a:r>
+          </a:p>
+        </p:txBody>
+      </p:sp>
+      <p:graphicFrame>
+        <p:nvGraphicFramePr>
+          <p:cNvPr id="6" name="Content Placeholder 5"/>
+          <p:cNvGraphicFramePr>
+            <a:graphicFrameLocks noGrp="1"/>
+          </p:cNvGraphicFramePr>
+          <p:nvPr>
+            <p:ph idx="1"/>
+          </p:nvPr>
+        </p:nvGraphicFramePr>
+        <p:xfrm>
+          <a:off x="457200" y="1193800"/>
+          <a:ext cx="8229600" cy="3390900"/>
+        </p:xfrm>
+        <a:graphic>
+          <a:graphicData uri="http://schemas.openxmlformats.org/drawingml/2006/table">
+            <a:tbl>
+              <a:tblPr firstRow="1" bandRow="1">
+                <a:tableStyleId>{5C22544A-7EE6-4342-B048-85BDC9FD1C3A}</a:tableStyleId>
+              </a:tblPr>
+              <a:tblGrid>
+                <a:gridCol w="1295400"/>
+                <a:gridCol w="1727200"/>
+                <a:gridCol w="1295400"/>
+                <a:gridCol w="1295400"/>
+                <a:gridCol w="1295400"/>
+                <a:gridCol w="1295400"/>
+              </a:tblGrid>
+              <a:tr h="0">
+                <a:tc>
+                  <a:txBody>
+                    <a:bodyPr/>
+                    <a:lstStyle/>
+                    <a:p>
+                      <a:pPr lvl="0" indent="0" marL="0">
+                        <a:buNone/>
+                      </a:pPr>
+                      <a:r>
+                        <a:rPr/>
+                        <a:t>Tags</a:t>
+                      </a:r>
+                    </a:p>
+                  </a:txBody>
+                  <a:tcPr/>
+                </a:tc>
+                <a:tc>
+                  <a:txBody>
+                    <a:bodyPr/>
+                    <a:lstStyle/>
+                    <a:p>
+                      <a:pPr lvl="0" indent="0" marL="0">
+                        <a:buNone/>
+                      </a:pPr>
+                      <a:r>
+                        <a:rPr/>
+                        <a:t>Description</a:t>
+                      </a:r>
+                    </a:p>
+                  </a:txBody>
+                  <a:tcPr/>
+                </a:tc>
+                <a:tc>
+                  <a:txBody>
+                    <a:bodyPr/>
+                    <a:lstStyle/>
+                    <a:p>
+                      <a:pPr lvl="0" indent="0" marL="0">
+                        <a:buNone/>
+                      </a:pPr>
+                      <a:r>
+                        <a:rPr/>
+                        <a:t>Units</a:t>
+                      </a:r>
+                    </a:p>
+                  </a:txBody>
+                  <a:tcPr/>
+                </a:tc>
+                <a:tc>
+                  <a:txBody>
+                    <a:bodyPr/>
+                    <a:lstStyle/>
+                    <a:p>
+                      <a:pPr lvl="0" indent="0" marL="0">
+                        <a:buNone/>
+                      </a:pPr>
+                      <a:r>
+                        <a:rPr/>
+                        <a:t>I13 35% Load</a:t>
+                      </a:r>
+                    </a:p>
+                  </a:txBody>
+                  <a:tcPr/>
+                </a:tc>
+                <a:tc>
+                  <a:txBody>
+                    <a:bodyPr/>
+                    <a:lstStyle/>
+                    <a:p>
+                      <a:pPr lvl="0" indent="0" marL="0">
+                        <a:buNone/>
+                      </a:pPr>
+                      <a:r>
+                        <a:rPr/>
+                        <a:t>I14 80% Load</a:t>
+                      </a:r>
+                    </a:p>
+                  </a:txBody>
+                  <a:tcPr/>
+                </a:tc>
+                <a:tc>
+                  <a:txBody>
+                    <a:bodyPr/>
+                    <a:lstStyle/>
+                    <a:p>
+                      <a:pPr lvl="0" indent="0" marL="0">
+                        <a:buNone/>
+                      </a:pPr>
+                      <a:r>
+                        <a:rPr/>
+                        <a:t>I10 230 MW</a:t>
+                      </a:r>
+                    </a:p>
+                  </a:txBody>
+                  <a:tcPr/>
+                </a:tc>
+              </a:tr>
+              <a:tr h="0">
+                <a:tc>
+                  <a:txBody>
+                    <a:bodyPr/>
+                    <a:lstStyle/>
+                    <a:p>
+                      <a:pPr lvl="0" indent="0" marL="0">
+                        <a:buNone/>
+                      </a:pPr>
+                      <a:r>
+                        <a:rPr/>
+                        <a:t>H03008</a:t>
+                      </a:r>
+                    </a:p>
+                  </a:txBody>
+                </a:tc>
+                <a:tc>
+                  <a:txBody>
+                    <a:bodyPr/>
+                    <a:lstStyle/>
+                    <a:p>
+                      <a:pPr lvl="0" indent="0" marL="0">
+                        <a:buNone/>
+                      </a:pPr>
+                      <a:r>
+                        <a:rPr/>
+                        <a:t>HP Turbine steam enthalpy at control valve</a:t>
+                      </a:r>
+                    </a:p>
+                  </a:txBody>
+                </a:tc>
+                <a:tc>
+                  <a:txBody>
+                    <a:bodyPr/>
+                    <a:lstStyle/>
+                    <a:p>
+                      <a:pPr lvl="0" indent="0" marL="0">
+                        <a:buNone/>
+                      </a:pPr>
+                      <a:r>
+                        <a:rPr/>
+                        <a:t>kJ/kg</a:t>
+                      </a:r>
+                    </a:p>
+                  </a:txBody>
+                </a:tc>
+                <a:tc>
+                  <a:txBody>
+                    <a:bodyPr/>
+                    <a:lstStyle/>
+                    <a:p>
+                      <a:pPr lvl="0" indent="0" marL="0">
+                        <a:buNone/>
+                      </a:pPr>
+                      <a:r>
+                        <a:rPr/>
+                        <a:t>3239.99</a:t>
+                      </a:r>
+                    </a:p>
+                  </a:txBody>
+                </a:tc>
+                <a:tc>
+                  <a:txBody>
+                    <a:bodyPr/>
+                    <a:lstStyle/>
+                    <a:p>
+                      <a:pPr lvl="0" indent="0" marL="0">
+                        <a:buNone/>
+                      </a:pPr>
+                      <a:r>
+                        <a:rPr/>
+                        <a:t>3421</a:t>
+                      </a:r>
+                    </a:p>
+                  </a:txBody>
+                </a:tc>
+                <a:tc>
+                  <a:txBody>
+                    <a:bodyPr/>
+                    <a:lstStyle/>
+                    <a:p>
+                      <a:pPr lvl="0" indent="0" marL="0">
+                        <a:buNone/>
+                      </a:pPr>
+                      <a:r>
+                        <a:rPr/>
+                        <a:t>3403.27</a:t>
+                      </a:r>
+                    </a:p>
+                  </a:txBody>
+                </a:tc>
+              </a:tr>
+              <a:tr h="0">
+                <a:tc>
+                  <a:txBody>
+                    <a:bodyPr/>
+                    <a:lstStyle/>
+                    <a:p>
+                      <a:pPr lvl="0" indent="0" marL="0">
+                        <a:buNone/>
+                      </a:pPr>
+                      <a:r>
+                        <a:rPr/>
+                        <a:t>H03016</a:t>
+                      </a:r>
+                    </a:p>
+                  </a:txBody>
+                </a:tc>
+                <a:tc>
+                  <a:txBody>
+                    <a:bodyPr/>
+                    <a:lstStyle/>
+                    <a:p>
+                      <a:pPr lvl="0" indent="0" marL="0">
+                        <a:buNone/>
+                      </a:pPr>
+                      <a:r>
+                        <a:rPr/>
+                        <a:t>HP Turbine steam enthalpy at outlet</a:t>
+                      </a:r>
+                    </a:p>
+                  </a:txBody>
+                </a:tc>
+                <a:tc>
+                  <a:txBody>
+                    <a:bodyPr/>
+                    <a:lstStyle/>
+                    <a:p>
+                      <a:pPr lvl="0" indent="0" marL="0">
+                        <a:buNone/>
+                      </a:pPr>
+                      <a:r>
+                        <a:rPr/>
+                        <a:t>kJ/kg</a:t>
+                      </a:r>
+                    </a:p>
+                  </a:txBody>
+                </a:tc>
+                <a:tc>
+                  <a:txBody>
+                    <a:bodyPr/>
+                    <a:lstStyle/>
+                    <a:p>
+                      <a:pPr lvl="0" indent="0" marL="0">
+                        <a:buNone/>
+                      </a:pPr>
+                      <a:r>
+                        <a:rPr/>
+                        <a:t>2927.25</a:t>
+                      </a:r>
+                    </a:p>
+                  </a:txBody>
+                </a:tc>
+                <a:tc>
+                  <a:txBody>
+                    <a:bodyPr/>
+                    <a:lstStyle/>
+                    <a:p>
+                      <a:pPr lvl="0" indent="0" marL="0">
+                        <a:buNone/>
+                      </a:pPr>
+                      <a:r>
+                        <a:rPr/>
+                        <a:t>3083.99</a:t>
+                      </a:r>
+                    </a:p>
+                  </a:txBody>
+                </a:tc>
+                <a:tc>
+                  <a:txBody>
+                    <a:bodyPr/>
+                    <a:lstStyle/>
+                    <a:p>
+                      <a:pPr lvl="0" indent="0" marL="0">
+                        <a:buNone/>
+                      </a:pPr>
+                      <a:r>
+                        <a:rPr/>
+                        <a:t>3075.49</a:t>
+                      </a:r>
+                    </a:p>
+                  </a:txBody>
+                </a:tc>
+              </a:tr>
+              <a:tr h="0">
+                <a:tc>
+                  <a:txBody>
+                    <a:bodyPr/>
+                    <a:lstStyle/>
+                    <a:p>
+                      <a:pPr lvl="0" indent="0" marL="0">
+                        <a:buNone/>
+                      </a:pPr>
+                      <a:r>
+                        <a:rPr/>
+                        <a:t>Z03020</a:t>
+                      </a:r>
+                    </a:p>
+                  </a:txBody>
+                </a:tc>
+                <a:tc>
+                  <a:txBody>
+                    <a:bodyPr/>
+                    <a:lstStyle/>
+                    <a:p>
+                      <a:pPr lvl="0" indent="0" marL="0">
+                        <a:buNone/>
+                      </a:pPr>
+                      <a:r>
+                        <a:rPr/>
+                        <a:t>HP turbine thermodynamic efficiency</a:t>
+                      </a:r>
+                    </a:p>
+                  </a:txBody>
+                </a:tc>
+                <a:tc>
+                  <a:txBody>
+                    <a:bodyPr/>
+                    <a:lstStyle/>
+                    <a:p>
+                      <a:pPr lvl="0" indent="0" marL="0">
+                        <a:buNone/>
+                      </a:pPr>
+                      <a:r>
+                        <a:rPr/>
+                        <a:t>%</a:t>
+                      </a:r>
+                    </a:p>
+                  </a:txBody>
+                </a:tc>
+                <a:tc>
+                  <a:txBody>
+                    <a:bodyPr/>
+                    <a:lstStyle/>
+                    <a:p>
+                      <a:pPr lvl="0" indent="0" marL="0">
+                        <a:buNone/>
+                      </a:pPr>
+                      <a:r>
+                        <a:rPr/>
+                        <a:t>85.95</a:t>
+                      </a:r>
+                    </a:p>
+                  </a:txBody>
+                </a:tc>
+                <a:tc>
+                  <a:txBody>
+                    <a:bodyPr/>
+                    <a:lstStyle/>
+                    <a:p>
+                      <a:pPr lvl="0" indent="0" marL="0">
+                        <a:buNone/>
+                      </a:pPr>
+                      <a:r>
+                        <a:rPr/>
+                        <a:t>88.4</a:t>
+                      </a:r>
+                    </a:p>
+                  </a:txBody>
+                </a:tc>
+                <a:tc>
+                  <a:txBody>
+                    <a:bodyPr/>
+                    <a:lstStyle/>
+                    <a:p>
+                      <a:pPr lvl="0" indent="0" marL="0">
+                        <a:buNone/>
+                      </a:pPr>
+                      <a:r>
+                        <a:rPr/>
+                        <a:t>88.39</a:t>
+                      </a:r>
+                    </a:p>
+                  </a:txBody>
+                </a:tc>
+              </a:tr>
+              <a:tr h="0">
+                <a:tc>
+                  <a:txBody>
+                    <a:bodyPr/>
+                    <a:lstStyle/>
+                    <a:p>
+                      <a:endParaRPr/>
+                    </a:p>
+                  </a:txBody>
+                </a:tc>
+                <a:tc>
+                  <a:txBody>
+                    <a:bodyPr/>
+                    <a:lstStyle/>
+                    <a:p>
+                      <a:pPr lvl="0" indent="0" marL="0">
+                        <a:buNone/>
+                      </a:pPr>
+                      <a:r>
+                        <a:rPr/>
+                        <a:t>Actual Change in Enthalpy</a:t>
+                      </a:r>
+                    </a:p>
+                  </a:txBody>
+                </a:tc>
+                <a:tc>
+                  <a:txBody>
+                    <a:bodyPr/>
+                    <a:lstStyle/>
+                    <a:p>
+                      <a:pPr lvl="0" indent="0" marL="0">
+                        <a:buNone/>
+                      </a:pPr>
+                      <a:r>
+                        <a:rPr/>
+                        <a:t>kJ/kg</a:t>
+                      </a:r>
+                    </a:p>
+                  </a:txBody>
+                </a:tc>
+                <a:tc>
+                  <a:txBody>
+                    <a:bodyPr/>
+                    <a:lstStyle/>
+                    <a:p>
+                      <a:pPr lvl="0" indent="0" marL="0">
+                        <a:buNone/>
+                      </a:pPr>
+                      <a:r>
+                        <a:rPr/>
+                        <a:t>312.74</a:t>
+                      </a:r>
+                    </a:p>
+                  </a:txBody>
+                </a:tc>
+                <a:tc>
+                  <a:txBody>
+                    <a:bodyPr/>
+                    <a:lstStyle/>
+                    <a:p>
+                      <a:pPr lvl="0" indent="0" marL="0">
+                        <a:buNone/>
+                      </a:pPr>
+                      <a:r>
+                        <a:rPr/>
+                        <a:t>337.01</a:t>
+                      </a:r>
+                    </a:p>
+                  </a:txBody>
+                </a:tc>
+                <a:tc>
+                  <a:txBody>
+                    <a:bodyPr/>
+                    <a:lstStyle/>
+                    <a:p>
+                      <a:pPr lvl="0" indent="0" marL="0">
+                        <a:buNone/>
+                      </a:pPr>
+                      <a:r>
+                        <a:rPr/>
+                        <a:t>327.78</a:t>
+                      </a:r>
+                    </a:p>
+                  </a:txBody>
+                </a:tc>
+              </a:tr>
+              <a:tr h="0">
+                <a:tc>
+                  <a:txBody>
+                    <a:bodyPr/>
+                    <a:lstStyle/>
+                    <a:p>
+                      <a:endParaRPr/>
+                    </a:p>
+                  </a:txBody>
+                </a:tc>
+                <a:tc>
+                  <a:txBody>
+                    <a:bodyPr/>
+                    <a:lstStyle/>
+                    <a:p>
+                      <a:pPr lvl="0" indent="0" marL="0">
+                        <a:buNone/>
+                      </a:pPr>
+                      <a:r>
+                        <a:rPr/>
+                        <a:t>Isentropic Change in Enthalpy</a:t>
+                      </a:r>
+                    </a:p>
+                  </a:txBody>
+                </a:tc>
+                <a:tc>
+                  <a:txBody>
+                    <a:bodyPr/>
+                    <a:lstStyle/>
+                    <a:p>
+                      <a:pPr lvl="0" indent="0" marL="0">
+                        <a:buNone/>
+                      </a:pPr>
+                      <a:r>
+                        <a:rPr/>
+                        <a:t>kJ/kg</a:t>
+                      </a:r>
+                    </a:p>
+                  </a:txBody>
+                </a:tc>
+                <a:tc>
+                  <a:txBody>
+                    <a:bodyPr/>
+                    <a:lstStyle/>
+                    <a:p>
+                      <a:pPr lvl="0" indent="0" marL="0">
+                        <a:buNone/>
+                      </a:pPr>
+                      <a:r>
+                        <a:rPr/>
+                        <a:t>363.86</a:t>
+                      </a:r>
+                    </a:p>
+                  </a:txBody>
+                </a:tc>
+                <a:tc>
+                  <a:txBody>
+                    <a:bodyPr/>
+                    <a:lstStyle/>
+                    <a:p>
+                      <a:pPr lvl="0" indent="0" marL="0">
+                        <a:buNone/>
+                      </a:pPr>
+                      <a:r>
+                        <a:rPr/>
+                        <a:t>381.23</a:t>
+                      </a:r>
+                    </a:p>
+                  </a:txBody>
+                </a:tc>
+                <a:tc>
+                  <a:txBody>
+                    <a:bodyPr/>
+                    <a:lstStyle/>
+                    <a:p>
+                      <a:pPr lvl="0" indent="0" marL="0">
+                        <a:buNone/>
+                      </a:pPr>
+                      <a:r>
+                        <a:rPr/>
+                        <a:t>370.83</a:t>
+                      </a:r>
+                    </a:p>
+                  </a:txBody>
+                </a:tc>
+              </a:tr>
+              <a:tr h="0">
+                <a:tc>
+                  <a:txBody>
+                    <a:bodyPr/>
+                    <a:lstStyle/>
+                    <a:p>
+                      <a:endParaRPr/>
+                    </a:p>
+                  </a:txBody>
+                </a:tc>
+                <a:tc>
+                  <a:txBody>
+                    <a:bodyPr/>
+                    <a:lstStyle/>
+                    <a:p>
+                      <a:pPr lvl="0" indent="0" marL="0">
+                        <a:buNone/>
+                      </a:pPr>
+                      <a:r>
+                        <a:rPr/>
+                        <a:t>Calculated ηTurbine</a:t>
+                      </a:r>
+                    </a:p>
+                  </a:txBody>
+                </a:tc>
+                <a:tc>
+                  <a:txBody>
+                    <a:bodyPr/>
+                    <a:lstStyle/>
+                    <a:p>
+                      <a:pPr lvl="0" indent="0" marL="0">
+                        <a:buNone/>
+                      </a:pPr>
+                      <a:r>
+                        <a:rPr/>
+                        <a:t>%</a:t>
+                      </a:r>
+                    </a:p>
+                  </a:txBody>
+                </a:tc>
+                <a:tc>
+                  <a:txBody>
+                    <a:bodyPr/>
+                    <a:lstStyle/>
+                    <a:p>
+                      <a:pPr lvl="0" indent="0" marL="0">
+                        <a:buNone/>
+                      </a:pPr>
+                      <a:r>
+                        <a:rPr/>
+                        <a:t>85.95</a:t>
+                      </a:r>
+                    </a:p>
+                  </a:txBody>
+                </a:tc>
+                <a:tc>
+                  <a:txBody>
+                    <a:bodyPr/>
+                    <a:lstStyle/>
+                    <a:p>
+                      <a:pPr lvl="0" indent="0" marL="0">
+                        <a:buNone/>
+                      </a:pPr>
+                      <a:r>
+                        <a:rPr/>
+                        <a:t>88.4</a:t>
+                      </a:r>
+                    </a:p>
+                  </a:txBody>
+                </a:tc>
+                <a:tc>
+                  <a:txBody>
+                    <a:bodyPr/>
+                    <a:lstStyle/>
+                    <a:p>
+                      <a:pPr lvl="0" indent="0" marL="0">
+                        <a:buNone/>
+                      </a:pPr>
+                      <a:r>
+                        <a:rPr/>
+                        <a:t>88.39</a:t>
+                      </a:r>
+                    </a:p>
+                  </a:txBody>
+                </a:tc>
+              </a:tr>
+            </a:tbl>
+          </a:graphicData>
+        </a:graphic>
+      </p:graphicFrame>
+    </p:spTree>
+  </p:cSld>
+</p:sld>
+</file>
+
+<file path=ppt/slides/slide22.xml><?xml version="1.0" encoding="utf-8"?>
+<p:sld xmlns:a="http://schemas.openxmlformats.org/drawingml/2006/main" xmlns:r="http://schemas.openxmlformats.org/officeDocument/2006/relationships" xmlns:p="http://schemas.openxmlformats.org/presentationml/2006/main">
+  <p:cSld>
+    <p:spTree>
+      <p:nvGrpSpPr>
+        <p:cNvPr id="1" name=""/>
+        <p:cNvGrpSpPr/>
+        <p:nvPr/>
+      </p:nvGrpSpPr>
+      <p:grpSpPr>
+        <a:xfrm>
+          <a:off x="0" y="0"/>
+          <a:ext cx="0" cy="0"/>
+          <a:chOff x="0" y="0"/>
+          <a:chExt cx="0" cy="0"/>
+        </a:xfrm>
+      </p:grpSpPr>
+      <p:sp>
+        <p:nvSpPr>
+          <p:cNvPr id="2" name="Title 1"/>
+          <p:cNvSpPr>
+            <a:spLocks noGrp="1"/>
+          </p:cNvSpPr>
+          <p:nvPr>
+            <p:ph type="title"/>
+          </p:nvPr>
+        </p:nvSpPr>
+        <p:spPr/>
+        <p:txBody>
+          <a:bodyPr/>
+          <a:lstStyle/>
+          <a:p>
+            <a:pPr lvl="0" indent="0" marL="0">
+              <a:buNone/>
+            </a:pPr>
+            <a:r>
+              <a:rPr/>
+              <a:t>Turbine Efficiency: Lab and Deliverables</a:t>
+            </a:r>
+          </a:p>
+        </p:txBody>
+      </p:sp>
+      <p:sp>
+        <p:nvSpPr>
+          <p:cNvPr id="3" name="Content Placeholder 2"/>
+          <p:cNvSpPr>
+            <a:spLocks noGrp="1"/>
+          </p:cNvSpPr>
+          <p:nvPr>
+            <p:ph idx="1"/>
+          </p:nvPr>
+        </p:nvSpPr>
+        <p:spPr/>
+        <p:txBody>
+          <a:bodyPr/>
+          <a:lstStyle/>
+          <a:p>
+            <a:pPr lvl="0"/>
+            <a:r>
+              <a:rPr/>
+              <a:t>Three initial conditions: I13 (35% load), I14 (80% load), and I10 (230 MW)</a:t>
+            </a:r>
+          </a:p>
+          <a:p>
+            <a:pPr lvl="0"/>
+            <a:r>
+              <a:rPr/>
+              <a:t>Compare results across conditions to determine which load yields the most favourable efficiency</a:t>
+            </a:r>
+          </a:p>
+          <a:p>
+            <a:pPr lvl="0"/>
+            <a:r>
+              <a:rPr/>
+              <a:t>Deliverables: trend plots for all three conditions, efficiency computations, and a conclusion with suggestions for further study</a:t>
+            </a:r>
+          </a:p>
+        </p:txBody>
+      </p:sp>
+    </p:spTree>
+  </p:cSld>
+</p:sld>
+</file>
+
+<file path=ppt/slides/slide23.xml><?xml version="1.0" encoding="utf-8"?>
+<p:sld xmlns:a="http://schemas.openxmlformats.org/drawingml/2006/main" xmlns:r="http://schemas.openxmlformats.org/officeDocument/2006/relationships" xmlns:p="http://schemas.openxmlformats.org/presentationml/2006/main">
+  <p:cSld>
+    <p:spTree>
+      <p:nvGrpSpPr>
+        <p:cNvPr id="1" name=""/>
+        <p:cNvGrpSpPr/>
+        <p:nvPr/>
+      </p:nvGrpSpPr>
+      <p:grpSpPr>
+        <a:xfrm>
+          <a:off x="0" y="0"/>
+          <a:ext cx="0" cy="0"/>
+          <a:chOff x="0" y="0"/>
+          <a:chExt cx="0" cy="0"/>
+        </a:xfrm>
+      </p:grpSpPr>
+      <p:sp>
+        <p:nvSpPr>
+          <p:cNvPr id="2" name="Title 1"/>
+          <p:cNvSpPr>
+            <a:spLocks noGrp="1"/>
+          </p:cNvSpPr>
+          <p:nvPr>
+            <p:ph type="title"/>
+          </p:nvPr>
+        </p:nvSpPr>
+        <p:spPr>
+          <a:xfrm>
+            <a:off x="722313" y="3305176"/>
+            <a:ext cx="7772400" cy="1021556"/>
+          </a:xfrm>
+        </p:spPr>
+        <p:txBody>
+          <a:bodyPr/>
+          <a:lstStyle/>
+          <a:p>
+            <a:pPr lvl="0" indent="0" marL="0">
+              <a:buNone/>
+            </a:pPr>
+            <a:r>
+              <a:rPr/>
+              <a:t>Power Plant Efficiency</a:t>
+            </a:r>
+          </a:p>
+        </p:txBody>
+      </p:sp>
+    </p:spTree>
+  </p:cSld>
+</p:sld>
+</file>
+
+<file path=ppt/slides/slide24.xml><?xml version="1.0" encoding="utf-8"?>
+<p:sld xmlns:a="http://schemas.openxmlformats.org/drawingml/2006/main" xmlns:r="http://schemas.openxmlformats.org/officeDocument/2006/relationships" xmlns:p="http://schemas.openxmlformats.org/presentationml/2006/main">
+  <p:cSld>
+    <p:spTree>
+      <p:nvGrpSpPr>
+        <p:cNvPr id="1" name=""/>
+        <p:cNvGrpSpPr/>
+        <p:nvPr/>
+      </p:nvGrpSpPr>
+      <p:grpSpPr>
+        <a:xfrm>
+          <a:off x="0" y="0"/>
+          <a:ext cx="0" cy="0"/>
+          <a:chOff x="0" y="0"/>
+          <a:chExt cx="0" cy="0"/>
+        </a:xfrm>
+      </p:grpSpPr>
+      <p:sp>
+        <p:nvSpPr>
+          <p:cNvPr id="2" name="Title 1"/>
+          <p:cNvSpPr>
+            <a:spLocks noGrp="1"/>
+          </p:cNvSpPr>
+          <p:nvPr>
+            <p:ph type="title"/>
+          </p:nvPr>
+        </p:nvSpPr>
+        <p:spPr/>
+        <p:txBody>
+          <a:bodyPr/>
+          <a:lstStyle/>
+          <a:p>
+            <a:pPr lvl="0" indent="0" marL="0">
+              <a:buNone/>
+            </a:pPr>
+            <a:r>
+              <a:rPr/>
+              <a:t>Objective and Theory</a:t>
+            </a:r>
+          </a:p>
+        </p:txBody>
+      </p:sp>
+      <mc:AlternateContent xmlns:mc="http://schemas.openxmlformats.org/markup-compatibility/2006">
+        <mc:Choice xmlns:a14="http://schemas.microsoft.com/office/drawing/2010/main" Requires="a14">
+          <p:sp>
+            <p:nvSpPr>
+              <p:cNvPr id="3" name="Content Placeholder 2"/>
+              <p:cNvSpPr>
+                <a:spLocks noGrp="1"/>
+              </p:cNvSpPr>
+              <p:nvPr>
+                <p:ph idx="1"/>
+              </p:nvPr>
+            </p:nvSpPr>
+            <p:spPr/>
+            <p:txBody>
+              <a:bodyPr/>
+              <a:lstStyle/>
+              <a:p>
+                <a:pPr lvl="0"/>
+                <a:r>
+                  <a:rPr/>
+                  <a:t>Operate the plant at full capacity and compute overall efficiency under three conditions: normal operation, high cooling water temperature (35°C), and without regeneration</a:t>
+                </a:r>
+              </a:p>
+              <a:p>
+                <a:pPr lvl="0"/>
+                <a:r>
+                  <a:rPr/>
+                  <a:t>The Rankine cycle efficiency is net work output over heat supplied in the boiler</a:t>
+                </a:r>
+              </a:p>
+              <a:p>
+                <a:pPr lvl="0" indent="0" marL="0">
+                  <a:buNone/>
+                </a:pPr>
+                <a14:m>
+                  <m:oMathPara xmlns:m="http://schemas.openxmlformats.org/officeDocument/2006/math">
+                    <m:oMathParaPr>
+                      <m:jc m:val="center"/>
+                    </m:oMathParaPr>
+                    <m:oMath>
+                      <m:sSub>
+                        <m:e>
+                          <m:r>
+                            <m:t>η</m:t>
+                          </m:r>
+                        </m:e>
+                        <m:sub>
+                          <m:r>
+                            <m:rPr>
+                              <m:nor/>
+                              <m:sty m:val="p"/>
+                            </m:rPr>
+                            <m:t>Rankine</m:t>
+                          </m:r>
+                        </m:sub>
+                      </m:sSub>
+                      <m:r>
+                        <m:rPr>
+                          <m:sty m:val="p"/>
+                        </m:rPr>
+                        <m:t>=</m:t>
+                      </m:r>
+                      <m:f>
+                        <m:fPr>
+                          <m:type m:val="bar"/>
+                        </m:fPr>
+                        <m:num>
+                          <m:sSub>
+                            <m:e>
+                              <m:r>
+                                <m:t>W</m:t>
+                              </m:r>
+                            </m:e>
+                            <m:sub>
+                              <m:r>
+                                <m:rPr>
+                                  <m:nor/>
+                                  <m:sty m:val="p"/>
+                                </m:rPr>
+                                <m:t>Turbine</m:t>
+                              </m:r>
+                            </m:sub>
+                          </m:sSub>
+                          <m:r>
+                            <m:rPr>
+                              <m:sty m:val="p"/>
+                            </m:rPr>
+                            <m:t>−</m:t>
+                          </m:r>
+                          <m:sSub>
+                            <m:e>
+                              <m:r>
+                                <m:t>W</m:t>
+                              </m:r>
+                            </m:e>
+                            <m:sub>
+                              <m:r>
+                                <m:rPr>
+                                  <m:nor/>
+                                  <m:sty m:val="p"/>
+                                </m:rPr>
+                                <m:t>Pump</m:t>
+                              </m:r>
+                            </m:sub>
+                          </m:sSub>
+                        </m:num>
+                        <m:den>
+                          <m:sSub>
+                            <m:e>
+                              <m:r>
+                                <m:t>Q</m:t>
+                              </m:r>
+                            </m:e>
+                            <m:sub>
+                              <m:r>
+                                <m:rPr>
+                                  <m:nor/>
+                                  <m:sty m:val="p"/>
+                                </m:rPr>
+                                <m:t>boiler</m:t>
+                              </m:r>
+                            </m:sub>
+                          </m:sSub>
+                        </m:den>
+                      </m:f>
+                    </m:oMath>
+                  </m:oMathPara>
+                </a14:m>
+              </a:p>
+            </p:txBody>
+          </p:sp>
+        </mc:Choice>
+      </mc:AlternateContent>
+    </p:spTree>
+  </p:cSld>
+</p:sld>
+</file>
+
+<file path=ppt/slides/slide25.xml><?xml version="1.0" encoding="utf-8"?>
+<p:sld xmlns:a="http://schemas.openxmlformats.org/drawingml/2006/main" xmlns:r="http://schemas.openxmlformats.org/officeDocument/2006/relationships" xmlns:p="http://schemas.openxmlformats.org/presentationml/2006/main">
+  <p:cSld>
+    <p:spTree>
+      <p:nvGrpSpPr>
+        <p:cNvPr id="1" name=""/>
+        <p:cNvGrpSpPr/>
+        <p:nvPr/>
+      </p:nvGrpSpPr>
+      <p:grpSpPr>
+        <a:xfrm>
+          <a:off x="0" y="0"/>
+          <a:ext cx="0" cy="0"/>
+          <a:chOff x="0" y="0"/>
+          <a:chExt cx="0" cy="0"/>
+        </a:xfrm>
+      </p:grpSpPr>
+      <p:sp>
+        <p:nvSpPr>
+          <p:cNvPr id="2" name="Title 1"/>
+          <p:cNvSpPr>
+            <a:spLocks noGrp="1"/>
+          </p:cNvSpPr>
+          <p:nvPr>
+            <p:ph type="title"/>
+          </p:nvPr>
+        </p:nvSpPr>
+        <p:spPr/>
+        <p:txBody>
+          <a:bodyPr/>
+          <a:lstStyle/>
+          <a:p>
+            <a:pPr lvl="0" indent="0" marL="0">
+              <a:buNone/>
+            </a:pPr>
+            <a:r>
+              <a:rPr/>
+              <a:t>Reheat and regeneration</a:t>
+            </a:r>
+          </a:p>
+        </p:txBody>
+      </p:sp>
+      <mc:AlternateContent xmlns:mc="http://schemas.openxmlformats.org/markup-compatibility/2006">
+        <mc:Choice xmlns:a14="http://schemas.microsoft.com/office/drawing/2010/main" Requires="a14">
+          <p:sp>
+            <p:nvSpPr>
+              <p:cNvPr id="3" name="Content Placeholder 2"/>
+              <p:cNvSpPr>
+                <a:spLocks noGrp="1"/>
+              </p:cNvSpPr>
+              <p:nvPr>
+                <p:ph idx="1"/>
+              </p:nvPr>
+            </p:nvSpPr>
+            <p:spPr/>
+            <p:txBody>
+              <a:bodyPr/>
+              <a:lstStyle/>
+              <a:p>
+                <a:pPr lvl="0"/>
+                <a:r>
+                  <a:rPr/>
+                  <a:t>Reheat and regeneration both raise the average temperature at which heat is supplied, improving efficiency over the simple Rankine cycle</a:t>
+                </a:r>
+              </a:p>
+              <a:p>
+                <a:pPr lvl="0" indent="0" marL="0">
+                  <a:buNone/>
+                </a:pPr>
+                <a14:m>
+                  <m:oMathPara xmlns:m="http://schemas.openxmlformats.org/officeDocument/2006/math">
+                    <m:oMathParaPr>
+                      <m:jc m:val="center"/>
+                    </m:oMathParaPr>
+                    <m:oMath>
+                      <m:sSub>
+                        <m:e>
+                          <m:r>
+                            <m:t>η</m:t>
+                          </m:r>
+                        </m:e>
+                        <m:sub>
+                          <m:r>
+                            <m:rPr>
+                              <m:nor/>
+                              <m:sty m:val="p"/>
+                            </m:rPr>
+                            <m:t>thermal</m:t>
+                          </m:r>
+                        </m:sub>
+                      </m:sSub>
+                      <m:r>
+                        <m:rPr>
+                          <m:sty m:val="p"/>
+                        </m:rPr>
+                        <m:t>=</m:t>
+                      </m:r>
+                      <m:f>
+                        <m:fPr>
+                          <m:type m:val="bar"/>
+                        </m:fPr>
+                        <m:num>
+                          <m:sSub>
+                            <m:e>
+                              <m:r>
+                                <m:t>W</m:t>
+                              </m:r>
+                            </m:e>
+                            <m:sub>
+                              <m:r>
+                                <m:rPr>
+                                  <m:nor/>
+                                  <m:sty m:val="p"/>
+                                </m:rPr>
+                                <m:t>Turbines</m:t>
+                              </m:r>
+                            </m:sub>
+                          </m:sSub>
+                          <m:r>
+                            <m:rPr>
+                              <m:sty m:val="p"/>
+                            </m:rPr>
+                            <m:t>−</m:t>
+                          </m:r>
+                          <m:sSub>
+                            <m:e>
+                              <m:r>
+                                <m:t>W</m:t>
+                              </m:r>
+                            </m:e>
+                            <m:sub>
+                              <m:r>
+                                <m:rPr>
+                                  <m:nor/>
+                                  <m:sty m:val="p"/>
+                                </m:rPr>
+                                <m:t>Pumps</m:t>
+                              </m:r>
+                            </m:sub>
+                          </m:sSub>
+                        </m:num>
+                        <m:den>
+                          <m:sSub>
+                            <m:e>
+                              <m:r>
+                                <m:t>Q</m:t>
+                              </m:r>
+                            </m:e>
+                            <m:sub>
+                              <m:r>
+                                <m:rPr>
+                                  <m:nor/>
+                                  <m:sty m:val="p"/>
+                                </m:rPr>
+                                <m:t>boiler</m:t>
+                              </m:r>
+                            </m:sub>
+                          </m:sSub>
+                          <m:r>
+                            <m:rPr>
+                              <m:sty m:val="p"/>
+                            </m:rPr>
+                            <m:t>+</m:t>
+                          </m:r>
+                          <m:sSub>
+                            <m:e>
+                              <m:r>
+                                <m:t>Q</m:t>
+                              </m:r>
+                            </m:e>
+                            <m:sub>
+                              <m:r>
+                                <m:rPr>
+                                  <m:nor/>
+                                  <m:sty m:val="p"/>
+                                </m:rPr>
+                                <m:t>Reheat1</m:t>
+                              </m:r>
+                            </m:sub>
+                          </m:sSub>
+                          <m:r>
+                            <m:rPr>
+                              <m:sty m:val="p"/>
+                            </m:rPr>
+                            <m:t>+</m:t>
+                          </m:r>
+                          <m:sSub>
+                            <m:e>
+                              <m:r>
+                                <m:t>Q</m:t>
+                              </m:r>
+                            </m:e>
+                            <m:sub>
+                              <m:r>
+                                <m:rPr>
+                                  <m:nor/>
+                                  <m:sty m:val="p"/>
+                                </m:rPr>
+                                <m:t>Reheat2</m:t>
+                              </m:r>
+                            </m:sub>
+                          </m:sSub>
+                        </m:den>
+                      </m:f>
+                    </m:oMath>
+                  </m:oMathPara>
+                </a14:m>
+              </a:p>
+            </p:txBody>
+          </p:sp>
+        </mc:Choice>
+      </mc:AlternateContent>
+    </p:spTree>
+  </p:cSld>
+</p:sld>
+</file>
+
+<file path=ppt/slides/slide26.xml><?xml version="1.0" encoding="utf-8"?>
+<p:sld xmlns:a="http://schemas.openxmlformats.org/drawingml/2006/main" xmlns:r="http://schemas.openxmlformats.org/officeDocument/2006/relationships" xmlns:p="http://schemas.openxmlformats.org/presentationml/2006/main">
+  <p:cSld>
+    <p:spTree>
+      <p:nvGrpSpPr>
+        <p:cNvPr id="1" name=""/>
+        <p:cNvGrpSpPr/>
+        <p:nvPr/>
+      </p:nvGrpSpPr>
+      <p:grpSpPr>
+        <a:xfrm>
+          <a:off x="0" y="0"/>
+          <a:ext cx="0" cy="0"/>
+          <a:chOff x="0" y="0"/>
+          <a:chExt cx="0" cy="0"/>
+        </a:xfrm>
+      </p:grpSpPr>
+      <p:sp>
+        <p:nvSpPr>
+          <p:cNvPr id="2" name="Title 1"/>
+          <p:cNvSpPr>
+            <a:spLocks noGrp="1"/>
+          </p:cNvSpPr>
+          <p:nvPr>
+            <p:ph type="title"/>
+          </p:nvPr>
+        </p:nvSpPr>
+        <p:spPr/>
+        <p:txBody>
+          <a:bodyPr/>
+          <a:lstStyle/>
+          <a:p>
+            <a:pPr lvl="0" indent="0" marL="0">
+              <a:buNone/>
+            </a:pPr>
+            <a:r>
+              <a:rPr/>
+              <a:t>Hints &amp; Tips: Trend Tags to Log</a:t>
+            </a:r>
+          </a:p>
+        </p:txBody>
+      </p:sp>
+      <p:graphicFrame>
+        <p:nvGraphicFramePr>
+          <p:cNvPr id="6" name="Content Placeholder 5"/>
+          <p:cNvGraphicFramePr>
+            <a:graphicFrameLocks noGrp="1"/>
+          </p:cNvGraphicFramePr>
+          <p:nvPr>
+            <p:ph idx="1"/>
+          </p:nvPr>
+        </p:nvGraphicFramePr>
+        <p:xfrm>
+          <a:off x="457200" y="1193800"/>
+          <a:ext cx="8229600" cy="3390900"/>
+        </p:xfrm>
+        <a:graphic>
+          <a:graphicData uri="http://schemas.openxmlformats.org/drawingml/2006/table">
+            <a:tbl>
+              <a:tblPr firstRow="1" bandRow="1">
+                <a:tableStyleId>{5C22544A-7EE6-4342-B048-85BDC9FD1C3A}</a:tableStyleId>
+              </a:tblPr>
+              <a:tblGrid>
+                <a:gridCol w="4114800"/>
+                <a:gridCol w="4114800"/>
+              </a:tblGrid>
+              <a:tr h="0">
+                <a:tc>
+                  <a:txBody>
+                    <a:bodyPr/>
+                    <a:lstStyle/>
+                    <a:p>
+                      <a:pPr lvl="0" indent="0" marL="0">
+                        <a:buNone/>
+                      </a:pPr>
+                      <a:r>
+                        <a:rPr/>
+                        <a:t>Tag</a:t>
+                      </a:r>
+                    </a:p>
+                  </a:txBody>
+                  <a:tcPr/>
+                </a:tc>
+                <a:tc>
+                  <a:txBody>
+                    <a:bodyPr/>
+                    <a:lstStyle/>
+                    <a:p>
+                      <a:pPr lvl="0" indent="0" marL="0">
+                        <a:buNone/>
+                      </a:pPr>
+                      <a:r>
+                        <a:rPr/>
+                        <a:t>Description</a:t>
+                      </a:r>
+                    </a:p>
+                  </a:txBody>
+                  <a:tcPr/>
+                </a:tc>
+              </a:tr>
+              <a:tr h="0">
+                <a:tc>
+                  <a:txBody>
+                    <a:bodyPr/>
+                    <a:lstStyle/>
+                    <a:p>
+                      <a:pPr lvl="0" indent="0" marL="0">
+                        <a:buNone/>
+                      </a:pPr>
+                      <a:r>
+                        <a:rPr>
+                          <a:latin typeface="Courier"/>
+                        </a:rPr>
+                        <a:t>Q02395</a:t>
+                      </a:r>
+                    </a:p>
+                  </a:txBody>
+                </a:tc>
+                <a:tc>
+                  <a:txBody>
+                    <a:bodyPr/>
+                    <a:lstStyle/>
+                    <a:p>
+                      <a:pPr lvl="0" indent="0" marL="0">
+                        <a:buNone/>
+                      </a:pPr>
+                      <a:r>
+                        <a:rPr/>
+                        <a:t>Reheater 1 transferred heat</a:t>
+                      </a:r>
+                    </a:p>
+                  </a:txBody>
+                </a:tc>
+              </a:tr>
+              <a:tr h="0">
+                <a:tc>
+                  <a:txBody>
+                    <a:bodyPr/>
+                    <a:lstStyle/>
+                    <a:p>
+                      <a:pPr lvl="0" indent="0" marL="0">
+                        <a:buNone/>
+                      </a:pPr>
+                      <a:r>
+                        <a:rPr>
+                          <a:latin typeface="Courier"/>
+                        </a:rPr>
+                        <a:t>Q02375</a:t>
+                      </a:r>
+                    </a:p>
+                  </a:txBody>
+                </a:tc>
+                <a:tc>
+                  <a:txBody>
+                    <a:bodyPr/>
+                    <a:lstStyle/>
+                    <a:p>
+                      <a:pPr lvl="0" indent="0" marL="0">
+                        <a:buNone/>
+                      </a:pPr>
+                      <a:r>
+                        <a:rPr/>
+                        <a:t>Reheater 2 transferred heat</a:t>
+                      </a:r>
+                    </a:p>
+                  </a:txBody>
+                </a:tc>
+              </a:tr>
+            </a:tbl>
+          </a:graphicData>
+        </a:graphic>
+      </p:graphicFrame>
+    </p:spTree>
+  </p:cSld>
+</p:sld>
+</file>
+
+<file path=ppt/slides/slide27.xml><?xml version="1.0" encoding="utf-8"?>
+<p:sld xmlns:a="http://schemas.openxmlformats.org/drawingml/2006/main" xmlns:r="http://schemas.openxmlformats.org/officeDocument/2006/relationships" xmlns:p="http://schemas.openxmlformats.org/presentationml/2006/main">
+  <p:cSld>
+    <p:spTree>
+      <p:nvGrpSpPr>
+        <p:cNvPr id="1" name=""/>
+        <p:cNvGrpSpPr/>
+        <p:nvPr/>
+      </p:nvGrpSpPr>
+      <p:grpSpPr>
+        <a:xfrm>
+          <a:off x="0" y="0"/>
+          <a:ext cx="0" cy="0"/>
+          <a:chOff x="0" y="0"/>
+          <a:chExt cx="0" cy="0"/>
+        </a:xfrm>
+      </p:grpSpPr>
+      <p:sp>
+        <p:nvSpPr>
+          <p:cNvPr id="2" name="Title 1"/>
+          <p:cNvSpPr>
+            <a:spLocks noGrp="1"/>
+          </p:cNvSpPr>
+          <p:nvPr>
+            <p:ph type="title"/>
+          </p:nvPr>
+        </p:nvSpPr>
+        <p:spPr/>
+        <p:txBody>
+          <a:bodyPr/>
+          <a:lstStyle/>
+          <a:p>
+            <a:pPr lvl="0" indent="0" marL="0">
+              <a:buNone/>
+            </a:pPr>
+            <a:r>
+              <a:rPr/>
+              <a:t>Hints &amp; Tips: Temperature Settings</a:t>
+            </a:r>
+          </a:p>
+        </p:txBody>
+      </p:sp>
+      <p:sp>
+        <p:nvSpPr>
+          <p:cNvPr id="3" name="Content Placeholder 2"/>
+          <p:cNvSpPr>
+            <a:spLocks noGrp="1"/>
+          </p:cNvSpPr>
+          <p:nvPr>
+            <p:ph idx="1"/>
+          </p:nvPr>
+        </p:nvSpPr>
+        <p:spPr/>
+        <p:txBody>
+          <a:bodyPr/>
+          <a:lstStyle/>
+          <a:p>
+            <a:pPr lvl="0"/>
+            <a:r>
+              <a:rPr/>
+              <a:t>For </a:t>
+            </a:r>
+            <a:r>
+              <a:rPr b="1"/>
+              <a:t>Boiler Feedwater Inlet Temperature</a:t>
+            </a:r>
+            <a:r>
+              <a:rPr/>
+              <a:t>, use the Startup Heat Exchanger Feedwater Outlet Temperature (tag </a:t>
+            </a:r>
+            <a:r>
+              <a:rPr>
+                <a:latin typeface="Courier"/>
+              </a:rPr>
+              <a:t>T02447</a:t>
+            </a:r>
+            <a:r>
+              <a:rPr/>
+              <a:t>).</a:t>
+            </a:r>
+          </a:p>
+          <a:p>
+            <a:pPr lvl="0"/>
+            <a:r>
+              <a:rPr/>
+              <a:t>For the third calculation, make sure you closed all steam extraction valves and set T00305 to 10°C:</a:t>
+            </a:r>
+          </a:p>
+        </p:txBody>
+      </p:sp>
+    </p:spTree>
+  </p:cSld>
+</p:sld>
+</file>
+
+<file path=ppt/slides/slide28.xml><?xml version="1.0" encoding="utf-8"?>
+<p:sld xmlns:a="http://schemas.openxmlformats.org/drawingml/2006/main" xmlns:r="http://schemas.openxmlformats.org/officeDocument/2006/relationships" xmlns:p="http://schemas.openxmlformats.org/presentationml/2006/main">
+  <p:cSld>
+    <p:spTree>
+      <p:nvGrpSpPr>
+        <p:cNvPr id="1" name=""/>
+        <p:cNvGrpSpPr/>
+        <p:nvPr/>
+      </p:nvGrpSpPr>
+      <p:grpSpPr>
+        <a:xfrm>
+          <a:off x="0" y="0"/>
+          <a:ext cx="0" cy="0"/>
+          <a:chOff x="0" y="0"/>
+          <a:chExt cx="0" cy="0"/>
+        </a:xfrm>
+      </p:grpSpPr>
+      <p:sp>
+        <p:nvSpPr>
+          <p:cNvPr id="2" name="Title 1"/>
+          <p:cNvSpPr>
+            <a:spLocks noGrp="1"/>
+          </p:cNvSpPr>
+          <p:nvPr>
+            <p:ph type="title"/>
+          </p:nvPr>
+        </p:nvSpPr>
+        <p:spPr/>
+        <p:txBody>
+          <a:bodyPr/>
+          <a:lstStyle/>
+          <a:p>
+            <a:pPr lvl="0" indent="0" marL="0">
+              <a:buNone/>
+            </a:pPr>
+            <a:r>
+              <a:rPr/>
+              <a:t>Lake Water Temperature Setting</a:t>
+            </a:r>
+          </a:p>
+        </p:txBody>
+      </p:sp>
+      <p:pic>
+        <p:nvPicPr>
+          <p:cNvPr descr="figures/LakeWaterTemp.jpg" id="0" name="Picture 1"/>
+          <p:cNvPicPr>
+            <a:picLocks noGrp="1" noChangeAspect="1"/>
+          </p:cNvPicPr>
+          <p:nvPr/>
+        </p:nvPicPr>
+        <p:blipFill>
+          <a:blip r:embed="rId2"/>
+          <a:stretch>
+            <a:fillRect/>
+          </a:stretch>
+        </p:blipFill>
+        <p:spPr bwMode="auto">
+          <a:xfrm>
+            <a:off x="1651000" y="1193800"/>
+            <a:ext cx="5842000" cy="2882900"/>
+          </a:xfrm>
+          <a:prstGeom prst="rect">
+            <a:avLst/>
+          </a:prstGeom>
+          <a:noFill/>
+          <a:ln w="9525">
+            <a:noFill/>
+            <a:headEnd/>
+            <a:tailEnd/>
+          </a:ln>
+        </p:spPr>
+      </p:pic>
+      <p:sp>
+        <p:nvSpPr>
+          <p:cNvPr id="1" name="TextBox 3"/>
+          <p:cNvSpPr txBox="1"/>
+          <p:nvPr>
+            <p:ph idx="1"/>
+          </p:nvPr>
+        </p:nvSpPr>
+        <p:spPr>
+          <a:xfrm>
+            <a:off x="457200" y="4076700"/>
+            <a:ext cx="8229600" cy="508000"/>
+          </a:xfrm>
+          <a:prstGeom prst="rect">
+            <a:avLst/>
+          </a:prstGeom>
+          <a:noFill/>
+        </p:spPr>
+        <p:txBody>
+          <a:bodyPr/>
+          <a:lstStyle/>
+          <a:p>
+            <a:pPr lvl="0" indent="0" marL="0" algn="ctr">
+              <a:buNone/>
+            </a:pPr>
+            <a:r>
+              <a:rPr/>
+              <a:t>Lake water temperature setting</a:t>
+            </a:r>
+          </a:p>
+        </p:txBody>
+      </p:sp>
+    </p:spTree>
+  </p:cSld>
+</p:sld>
+</file>
+
+<file path=ppt/slides/slide29.xml><?xml version="1.0" encoding="utf-8"?>
+<p:sld xmlns:a="http://schemas.openxmlformats.org/drawingml/2006/main" xmlns:r="http://schemas.openxmlformats.org/officeDocument/2006/relationships" xmlns:p="http://schemas.openxmlformats.org/presentationml/2006/main">
+  <p:cSld>
+    <p:spTree>
+      <p:nvGrpSpPr>
+        <p:cNvPr id="1" name=""/>
+        <p:cNvGrpSpPr/>
+        <p:nvPr/>
+      </p:nvGrpSpPr>
+      <p:grpSpPr>
+        <a:xfrm>
+          <a:off x="0" y="0"/>
+          <a:ext cx="0" cy="0"/>
+          <a:chOff x="0" y="0"/>
+          <a:chExt cx="0" cy="0"/>
+        </a:xfrm>
+      </p:grpSpPr>
+      <p:sp>
+        <p:nvSpPr>
+          <p:cNvPr id="2" name="Title 1"/>
+          <p:cNvSpPr>
+            <a:spLocks noGrp="1"/>
+          </p:cNvSpPr>
+          <p:nvPr>
+            <p:ph type="title"/>
+          </p:nvPr>
+        </p:nvSpPr>
+        <p:spPr/>
+        <p:txBody>
+          <a:bodyPr/>
+          <a:lstStyle/>
+          <a:p>
+            <a:pPr lvl="0" indent="0" marL="0">
+              <a:buNone/>
+            </a:pPr>
+            <a:r>
+              <a:rPr/>
+              <a:t>No steam extraction</a:t>
+            </a:r>
+          </a:p>
+        </p:txBody>
+      </p:sp>
+      <p:pic>
+        <p:nvPicPr>
+          <p:cNvPr descr="figures/NoExtraction.jpg" id="0" name="Picture 1"/>
+          <p:cNvPicPr>
+            <a:picLocks noGrp="1" noChangeAspect="1"/>
+          </p:cNvPicPr>
+          <p:nvPr/>
+        </p:nvPicPr>
+        <p:blipFill>
+          <a:blip r:embed="rId2"/>
+          <a:stretch>
+            <a:fillRect/>
+          </a:stretch>
+        </p:blipFill>
+        <p:spPr bwMode="auto">
+          <a:xfrm>
+            <a:off x="1892300" y="1193800"/>
+            <a:ext cx="5359400" cy="2882900"/>
+          </a:xfrm>
+          <a:prstGeom prst="rect">
+            <a:avLst/>
+          </a:prstGeom>
+          <a:noFill/>
+          <a:ln w="9525">
+            <a:noFill/>
+            <a:headEnd/>
+            <a:tailEnd/>
+          </a:ln>
+        </p:spPr>
+      </p:pic>
+      <p:sp>
+        <p:nvSpPr>
+          <p:cNvPr id="1" name="TextBox 3"/>
+          <p:cNvSpPr txBox="1"/>
+          <p:nvPr>
+            <p:ph idx="1"/>
+          </p:nvPr>
+        </p:nvSpPr>
+        <p:spPr>
+          <a:xfrm>
+            <a:off x="457200" y="4076700"/>
+            <a:ext cx="8229600" cy="508000"/>
+          </a:xfrm>
+          <a:prstGeom prst="rect">
+            <a:avLst/>
+          </a:prstGeom>
+          <a:noFill/>
+        </p:spPr>
+        <p:txBody>
+          <a:bodyPr/>
+          <a:lstStyle/>
+          <a:p>
+            <a:pPr lvl="0" indent="0" marL="0" algn="ctr">
+              <a:buNone/>
+            </a:pPr>
+            <a:r>
+              <a:rPr/>
+              <a:t>No steam extraction</a:t>
+            </a:r>
+          </a:p>
+        </p:txBody>
+      </p:sp>
+    </p:spTree>
+  </p:cSld>
+</p:sld>
+</file>
+
+<file path=ppt/slides/slide3.xml><?xml version="1.0" encoding="utf-8"?>
+<p:sld xmlns:a="http://schemas.openxmlformats.org/drawingml/2006/main" xmlns:r="http://schemas.openxmlformats.org/officeDocument/2006/relationships" xmlns:p="http://schemas.openxmlformats.org/presentationml/2006/main">
+  <p:cSld>
+    <p:spTree>
+      <p:nvGrpSpPr>
+        <p:cNvPr id="1" name=""/>
+        <p:cNvGrpSpPr/>
+        <p:nvPr/>
+      </p:nvGrpSpPr>
+      <p:grpSpPr>
+        <a:xfrm>
+          <a:off x="0" y="0"/>
+          <a:ext cx="0" cy="0"/>
+          <a:chOff x="0" y="0"/>
+          <a:chExt cx="0" cy="0"/>
+        </a:xfrm>
+      </p:grpSpPr>
+      <p:sp>
+        <p:nvSpPr>
+          <p:cNvPr id="2" name="Title 1"/>
+          <p:cNvSpPr>
+            <a:spLocks noGrp="1"/>
+          </p:cNvSpPr>
+          <p:nvPr>
+            <p:ph type="title"/>
+          </p:nvPr>
+        </p:nvSpPr>
+        <p:spPr/>
+        <p:txBody>
+          <a:bodyPr/>
+          <a:lstStyle/>
+          <a:p>
+            <a:pPr lvl="0" indent="0" marL="0">
+              <a:buNone/>
+            </a:pPr>
+            <a:r>
+              <a:rPr/>
+              <a:t>The Challenge</a:t>
+            </a:r>
+          </a:p>
+        </p:txBody>
+      </p:sp>
+      <p:sp>
+        <p:nvSpPr>
+          <p:cNvPr id="3" name="Content Placeholder 2"/>
+          <p:cNvSpPr>
+            <a:spLocks noGrp="1"/>
+          </p:cNvSpPr>
+          <p:nvPr>
+            <p:ph idx="1"/>
+          </p:nvPr>
+        </p:nvSpPr>
+        <p:spPr/>
+        <p:txBody>
+          <a:bodyPr/>
+          <a:lstStyle/>
+          <a:p>
+            <a:pPr lvl="0"/>
+            <a:r>
+              <a:rPr/>
+              <a:t>Power Engineering students often struggle with theoretical concepts</a:t>
+            </a:r>
+          </a:p>
+          <a:p>
+            <a:pPr lvl="0"/>
+            <a:r>
+              <a:rPr/>
+              <a:t>Instructors face limited instructional time to cover both theory and practice</a:t>
+            </a:r>
+          </a:p>
+          <a:p>
+            <a:pPr lvl="0"/>
+            <a:r>
+              <a:rPr/>
+              <a:t>A gap remains between classroom theory and hands on plant operation</a:t>
+            </a:r>
+          </a:p>
+        </p:txBody>
+      </p:sp>
+    </p:spTree>
+  </p:cSld>
+</p:sld>
+</file>
+
+<file path=ppt/slides/slide30.xml><?xml version="1.0" encoding="utf-8"?>
+<p:sld xmlns:a="http://schemas.openxmlformats.org/drawingml/2006/main" xmlns:r="http://schemas.openxmlformats.org/officeDocument/2006/relationships" xmlns:p="http://schemas.openxmlformats.org/presentationml/2006/main">
+  <p:cSld>
+    <p:spTree>
+      <p:nvGrpSpPr>
+        <p:cNvPr id="1" name=""/>
+        <p:cNvGrpSpPr/>
+        <p:nvPr/>
+      </p:nvGrpSpPr>
+      <p:grpSpPr>
+        <a:xfrm>
+          <a:off x="0" y="0"/>
+          <a:ext cx="0" cy="0"/>
+          <a:chOff x="0" y="0"/>
+          <a:chExt cx="0" cy="0"/>
+        </a:xfrm>
+      </p:grpSpPr>
+      <p:sp>
+        <p:nvSpPr>
+          <p:cNvPr id="2" name="Title 1"/>
+          <p:cNvSpPr>
+            <a:spLocks noGrp="1"/>
+          </p:cNvSpPr>
+          <p:nvPr>
+            <p:ph type="title"/>
+          </p:nvPr>
+        </p:nvSpPr>
+        <p:spPr/>
+        <p:txBody>
+          <a:bodyPr/>
+          <a:lstStyle/>
+          <a:p>
+            <a:pPr lvl="0" indent="0" marL="0">
+              <a:buNone/>
+            </a:pPr>
+            <a:r>
+              <a:rPr/>
+              <a:t>Power Plant Efficiency: Lab and Deliverables</a:t>
+            </a:r>
+          </a:p>
+        </p:txBody>
+      </p:sp>
+      <p:sp>
+        <p:nvSpPr>
+          <p:cNvPr id="3" name="Content Placeholder 2"/>
+          <p:cNvSpPr>
+            <a:spLocks noGrp="1"/>
+          </p:cNvSpPr>
+          <p:nvPr>
+            <p:ph idx="1"/>
+          </p:nvPr>
+        </p:nvSpPr>
+        <p:spPr/>
+        <p:txBody>
+          <a:bodyPr/>
+          <a:lstStyle/>
+          <a:p>
+            <a:pPr lvl="0"/>
+            <a:r>
+              <a:rPr/>
+              <a:t>Run initial condition I10 and draw a T-S diagram of the cycle including reheat and regeneration</a:t>
+            </a:r>
+          </a:p>
+          <a:p>
+            <a:pPr lvl="0"/>
+            <a:r>
+              <a:rPr/>
+              <a:t>Set cooling water temperature (tag T00305) to 35°C for the high temperature case, and to 10°C with extraction valves closed for the no regeneration case</a:t>
+            </a:r>
+          </a:p>
+          <a:p>
+            <a:pPr lvl="0"/>
+            <a:r>
+              <a:rPr/>
+              <a:t>Deliverables: T-S diagram, trend plots, efficiency computations for all three conditions, and a conclusion</a:t>
+            </a:r>
+          </a:p>
+        </p:txBody>
+      </p:sp>
+    </p:spTree>
+  </p:cSld>
+</p:sld>
+</file>
+
+<file path=ppt/slides/slide31.xml><?xml version="1.0" encoding="utf-8"?>
+<p:sld xmlns:a="http://schemas.openxmlformats.org/drawingml/2006/main" xmlns:r="http://schemas.openxmlformats.org/officeDocument/2006/relationships" xmlns:p="http://schemas.openxmlformats.org/presentationml/2006/main">
+  <p:cSld>
+    <p:spTree>
+      <p:nvGrpSpPr>
+        <p:cNvPr id="1" name=""/>
+        <p:cNvGrpSpPr/>
+        <p:nvPr/>
+      </p:nvGrpSpPr>
+      <p:grpSpPr>
+        <a:xfrm>
+          <a:off x="0" y="0"/>
+          <a:ext cx="0" cy="0"/>
+          <a:chOff x="0" y="0"/>
+          <a:chExt cx="0" cy="0"/>
+        </a:xfrm>
+      </p:grpSpPr>
+      <p:sp>
+        <p:nvSpPr>
+          <p:cNvPr id="2" name="Title 1"/>
+          <p:cNvSpPr>
+            <a:spLocks noGrp="1"/>
+          </p:cNvSpPr>
+          <p:nvPr>
+            <p:ph type="title"/>
+          </p:nvPr>
+        </p:nvSpPr>
+        <p:spPr>
+          <a:xfrm>
+            <a:off x="722313" y="3305176"/>
+            <a:ext cx="7772400" cy="1021556"/>
+          </a:xfrm>
+        </p:spPr>
+        <p:txBody>
+          <a:bodyPr/>
+          <a:lstStyle/>
+          <a:p>
+            <a:pPr lvl="0" indent="0" marL="0">
+              <a:buNone/>
+            </a:pPr>
+            <a:r>
+              <a:rPr/>
+              <a:t>Summary</a:t>
+            </a:r>
+          </a:p>
+        </p:txBody>
+      </p:sp>
+    </p:spTree>
+  </p:cSld>
+</p:sld>
+</file>
+
+<file path=ppt/slides/slide32.xml><?xml version="1.0" encoding="utf-8"?>
+<p:sld xmlns:a="http://schemas.openxmlformats.org/drawingml/2006/main" xmlns:r="http://schemas.openxmlformats.org/officeDocument/2006/relationships" xmlns:p="http://schemas.openxmlformats.org/presentationml/2006/main">
+  <p:cSld>
+    <p:spTree>
+      <p:nvGrpSpPr>
+        <p:cNvPr id="1" name=""/>
+        <p:cNvGrpSpPr/>
+        <p:nvPr/>
+      </p:nvGrpSpPr>
+      <p:grpSpPr>
+        <a:xfrm>
+          <a:off x="0" y="0"/>
+          <a:ext cx="0" cy="0"/>
+          <a:chOff x="0" y="0"/>
+          <a:chExt cx="0" cy="0"/>
+        </a:xfrm>
+      </p:grpSpPr>
+      <p:sp>
+        <p:nvSpPr>
+          <p:cNvPr id="2" name="Title 1"/>
+          <p:cNvSpPr>
+            <a:spLocks noGrp="1"/>
+          </p:cNvSpPr>
+          <p:nvPr>
+            <p:ph type="title"/>
+          </p:nvPr>
+        </p:nvSpPr>
+        <p:spPr/>
+        <p:txBody>
+          <a:bodyPr/>
+          <a:lstStyle/>
+          <a:p>
+            <a:pPr lvl="0" indent="0" marL="0">
+              <a:buNone/>
+            </a:pPr>
+            <a:r>
+              <a:rPr/>
+              <a:t>Conclusion</a:t>
+            </a:r>
+          </a:p>
+        </p:txBody>
+      </p:sp>
+      <p:sp>
+        <p:nvSpPr>
+          <p:cNvPr id="3" name="Content Placeholder 2"/>
+          <p:cNvSpPr>
+            <a:spLocks noGrp="1"/>
+          </p:cNvSpPr>
+          <p:nvPr>
+            <p:ph idx="1"/>
+          </p:nvPr>
+        </p:nvSpPr>
+        <p:spPr/>
+        <p:txBody>
+          <a:bodyPr/>
+          <a:lstStyle/>
+          <a:p>
+            <a:pPr lvl="0"/>
+            <a:r>
+              <a:rPr/>
+              <a:t>SIM LABS bridge the gap between theory and practical plant operation</a:t>
+            </a:r>
+          </a:p>
+          <a:p>
+            <a:pPr lvl="0"/>
+            <a:r>
+              <a:rPr/>
+              <a:t>Each lab pairs a theoretical model with hands on simulator operation, reinforcing safe practice and environmental awareness</a:t>
+            </a:r>
+          </a:p>
+          <a:p>
+            <a:pPr lvl="0"/>
+            <a:r>
+              <a:rPr/>
+              <a:t>Q&amp;A</a:t>
+            </a:r>
+          </a:p>
+        </p:txBody>
+      </p:sp>
+    </p:spTree>
+  </p:cSld>
+</p:sld>
+</file>
+
+<file path=ppt/slides/slide4.xml><?xml version="1.0" encoding="utf-8"?>
+<p:sld xmlns:a="http://schemas.openxmlformats.org/drawingml/2006/main" xmlns:r="http://schemas.openxmlformats.org/officeDocument/2006/relationships" xmlns:p="http://schemas.openxmlformats.org/presentationml/2006/main">
+  <p:cSld>
+    <p:spTree>
+      <p:nvGrpSpPr>
+        <p:cNvPr id="1" name=""/>
+        <p:cNvGrpSpPr/>
+        <p:nvPr/>
+      </p:nvGrpSpPr>
+      <p:grpSpPr>
+        <a:xfrm>
+          <a:off x="0" y="0"/>
+          <a:ext cx="0" cy="0"/>
+          <a:chOff x="0" y="0"/>
+          <a:chExt cx="0" cy="0"/>
+        </a:xfrm>
+      </p:grpSpPr>
+      <p:sp>
+        <p:nvSpPr>
+          <p:cNvPr id="2" name="Title 1"/>
+          <p:cNvSpPr>
+            <a:spLocks noGrp="1"/>
+          </p:cNvSpPr>
+          <p:nvPr>
+            <p:ph type="title"/>
+          </p:nvPr>
+        </p:nvSpPr>
+        <p:spPr/>
+        <p:txBody>
+          <a:bodyPr/>
+          <a:lstStyle/>
+          <a:p>
+            <a:pPr lvl="0" indent="0" marL="0">
+              <a:buNone/>
+            </a:pPr>
+            <a:r>
+              <a:rPr/>
+              <a:t>How SIM LABS Help</a:t>
+            </a:r>
+          </a:p>
+        </p:txBody>
+      </p:sp>
+      <p:sp>
+        <p:nvSpPr>
+          <p:cNvPr id="3" name="Content Placeholder 2"/>
+          <p:cNvSpPr>
+            <a:spLocks noGrp="1"/>
+          </p:cNvSpPr>
+          <p:nvPr>
+            <p:ph idx="1"/>
+          </p:nvPr>
+        </p:nvSpPr>
+        <p:spPr/>
+        <p:txBody>
+          <a:bodyPr/>
+          <a:lstStyle/>
+          <a:p>
+            <a:pPr lvl="0"/>
+            <a:r>
+              <a:rPr/>
+              <a:t>Strengthen understanding of core ThermoFluids principles</a:t>
+            </a:r>
+          </a:p>
+          <a:p>
+            <a:pPr lvl="0"/>
+            <a:r>
+              <a:rPr/>
+              <a:t>Support application of theory in realistic operational contexts</a:t>
+            </a:r>
+          </a:p>
+          <a:p>
+            <a:pPr lvl="0"/>
+            <a:r>
+              <a:rPr/>
+              <a:t>Allow students to visualize processes and explore system behaviour</a:t>
+            </a:r>
+          </a:p>
+          <a:p>
+            <a:pPr lvl="0"/>
+            <a:r>
+              <a:rPr/>
+              <a:t>Build cause and effect connections between operating parameters and outcomes</a:t>
+            </a:r>
+          </a:p>
+        </p:txBody>
+      </p:sp>
+    </p:spTree>
+  </p:cSld>
+</p:sld>
+</file>
+
+<file path=ppt/slides/slide5.xml><?xml version="1.0" encoding="utf-8"?>
+<p:sld xmlns:a="http://schemas.openxmlformats.org/drawingml/2006/main" xmlns:r="http://schemas.openxmlformats.org/officeDocument/2006/relationships" xmlns:p="http://schemas.openxmlformats.org/presentationml/2006/main">
+  <p:cSld>
+    <p:spTree>
+      <p:nvGrpSpPr>
+        <p:cNvPr id="1" name=""/>
+        <p:cNvGrpSpPr/>
+        <p:nvPr/>
+      </p:nvGrpSpPr>
+      <p:grpSpPr>
+        <a:xfrm>
+          <a:off x="0" y="0"/>
+          <a:ext cx="0" cy="0"/>
+          <a:chOff x="0" y="0"/>
+          <a:chExt cx="0" cy="0"/>
+        </a:xfrm>
+      </p:grpSpPr>
+      <p:sp>
+        <p:nvSpPr>
+          <p:cNvPr id="2" name="Title 1"/>
+          <p:cNvSpPr>
+            <a:spLocks noGrp="1"/>
+          </p:cNvSpPr>
+          <p:nvPr>
+            <p:ph type="title"/>
+          </p:nvPr>
+        </p:nvSpPr>
+        <p:spPr/>
+        <p:txBody>
+          <a:bodyPr/>
+          <a:lstStyle/>
+          <a:p>
+            <a:pPr lvl="0" indent="0" marL="0">
+              <a:buNone/>
+            </a:pPr>
+            <a:r>
+              <a:rPr/>
+              <a:t>Learning Benefits</a:t>
+            </a:r>
+          </a:p>
+        </p:txBody>
+      </p:sp>
+      <p:sp>
+        <p:nvSpPr>
+          <p:cNvPr id="3" name="Content Placeholder 2"/>
+          <p:cNvSpPr>
+            <a:spLocks noGrp="1"/>
+          </p:cNvSpPr>
+          <p:nvPr>
+            <p:ph idx="1"/>
+          </p:nvPr>
+        </p:nvSpPr>
+        <p:spPr/>
+        <p:txBody>
+          <a:bodyPr/>
+          <a:lstStyle/>
+          <a:p>
+            <a:pPr lvl="0"/>
+            <a:r>
+              <a:rPr/>
+              <a:t>Enhance conceptual comprehension</a:t>
+            </a:r>
+          </a:p>
+          <a:p>
+            <a:pPr lvl="0"/>
+            <a:r>
+              <a:rPr/>
+              <a:t>Prepare learners for hands on work with real equipment in a physical plant</a:t>
+            </a:r>
+          </a:p>
+          <a:p>
+            <a:pPr lvl="0"/>
+            <a:r>
+              <a:rPr/>
+              <a:t>Reinforce safe operational practices</a:t>
+            </a:r>
+          </a:p>
+          <a:p>
+            <a:pPr lvl="0"/>
+            <a:r>
+              <a:rPr/>
+              <a:t>Build environmental awareness within steam plant systems</a:t>
+            </a:r>
+          </a:p>
+        </p:txBody>
+      </p:sp>
+    </p:spTree>
+  </p:cSld>
+</p:sld>
+</file>
+
+<file path=ppt/slides/slide6.xml><?xml version="1.0" encoding="utf-8"?>
+<p:sld xmlns:a="http://schemas.openxmlformats.org/drawingml/2006/main" xmlns:r="http://schemas.openxmlformats.org/officeDocument/2006/relationships" xmlns:p="http://schemas.openxmlformats.org/presentationml/2006/main">
+  <p:cSld>
+    <p:spTree>
+      <p:nvGrpSpPr>
+        <p:cNvPr id="1" name=""/>
+        <p:cNvGrpSpPr/>
+        <p:nvPr/>
+      </p:nvGrpSpPr>
+      <p:grpSpPr>
+        <a:xfrm>
+          <a:off x="0" y="0"/>
+          <a:ext cx="0" cy="0"/>
+          <a:chOff x="0" y="0"/>
+          <a:chExt cx="0" cy="0"/>
+        </a:xfrm>
+      </p:grpSpPr>
+      <p:sp>
+        <p:nvSpPr>
+          <p:cNvPr id="2" name="Title 1"/>
+          <p:cNvSpPr>
+            <a:spLocks noGrp="1"/>
+          </p:cNvSpPr>
+          <p:nvPr>
+            <p:ph type="title"/>
+          </p:nvPr>
+        </p:nvSpPr>
+        <p:spPr/>
+        <p:txBody>
+          <a:bodyPr/>
+          <a:lstStyle/>
+          <a:p>
+            <a:pPr lvl="0" indent="0" marL="0">
+              <a:buNone/>
+            </a:pPr>
+            <a:r>
+              <a:rPr/>
+              <a:t>SIM LABS</a:t>
+            </a:r>
+          </a:p>
+        </p:txBody>
+      </p:sp>
+      <p:sp>
+        <p:nvSpPr>
+          <p:cNvPr id="3" name="Content Placeholder 2"/>
+          <p:cNvSpPr>
+            <a:spLocks noGrp="1"/>
+          </p:cNvSpPr>
+          <p:nvPr>
+            <p:ph idx="1"/>
+          </p:nvPr>
+        </p:nvSpPr>
+        <p:spPr/>
+        <p:txBody>
+          <a:bodyPr/>
+          <a:lstStyle/>
+          <a:p>
+            <a:pPr lvl="0"/>
+            <a:r>
+              <a:rPr/>
+              <a:t>Boiler Efficiency</a:t>
+            </a:r>
+          </a:p>
+          <a:p>
+            <a:pPr lvl="0"/>
+            <a:r>
+              <a:rPr/>
+              <a:t>Turbine Efficiency</a:t>
+            </a:r>
+          </a:p>
+          <a:p>
+            <a:pPr lvl="0"/>
+            <a:r>
+              <a:rPr/>
+              <a:t>Power Plant Efficiency</a:t>
+            </a:r>
+          </a:p>
+          <a:p>
+            <a:pPr lvl="0"/>
+            <a:r>
+              <a:rPr/>
+              <a:t>NOx Emissions</a:t>
+            </a:r>
+          </a:p>
+          <a:p>
+            <a:pPr lvl="0"/>
+            <a:r>
+              <a:rPr/>
+              <a:t>Heat Exchangers</a:t>
+            </a:r>
+          </a:p>
+          <a:p>
+            <a:pPr lvl="0"/>
+            <a:r>
+              <a:rPr/>
+              <a:t>Combustion Analysis</a:t>
+            </a:r>
+          </a:p>
+        </p:txBody>
+      </p:sp>
+    </p:spTree>
+  </p:cSld>
+</p:sld>
+</file>
+
+<file path=ppt/slides/slide7.xml><?xml version="1.0" encoding="utf-8"?>
+<p:sld xmlns:a="http://schemas.openxmlformats.org/drawingml/2006/main" xmlns:r="http://schemas.openxmlformats.org/officeDocument/2006/relationships" xmlns:p="http://schemas.openxmlformats.org/presentationml/2006/main">
+  <p:cSld>
+    <p:spTree>
+      <p:nvGrpSpPr>
+        <p:cNvPr id="1" name=""/>
+        <p:cNvGrpSpPr/>
+        <p:nvPr/>
+      </p:nvGrpSpPr>
+      <p:grpSpPr>
+        <a:xfrm>
+          <a:off x="0" y="0"/>
+          <a:ext cx="0" cy="0"/>
+          <a:chOff x="0" y="0"/>
+          <a:chExt cx="0" cy="0"/>
+        </a:xfrm>
+      </p:grpSpPr>
+      <p:sp>
+        <p:nvSpPr>
+          <p:cNvPr id="2" name="Title 1"/>
+          <p:cNvSpPr>
+            <a:spLocks noGrp="1"/>
+          </p:cNvSpPr>
+          <p:nvPr>
+            <p:ph type="title"/>
+          </p:nvPr>
+        </p:nvSpPr>
+        <p:spPr/>
+        <p:txBody>
+          <a:bodyPr/>
+          <a:lstStyle/>
+          <a:p>
+            <a:pPr lvl="0" indent="0" marL="0">
+              <a:buNone/>
+            </a:pPr>
+            <a:r>
+              <a:rPr/>
+              <a:t>SIM LABS Featured in This Session</a:t>
+            </a:r>
+          </a:p>
+        </p:txBody>
+      </p:sp>
+      <p:sp>
+        <p:nvSpPr>
+          <p:cNvPr id="3" name="Content Placeholder 2"/>
+          <p:cNvSpPr>
+            <a:spLocks noGrp="1"/>
+          </p:cNvSpPr>
+          <p:nvPr>
+            <p:ph idx="1"/>
+          </p:nvPr>
+        </p:nvSpPr>
+        <p:spPr/>
+        <p:txBody>
+          <a:bodyPr/>
+          <a:lstStyle/>
+          <a:p>
+            <a:pPr lvl="0"/>
+            <a:r>
+              <a:rPr/>
+              <a:t>Boiler Efficiency</a:t>
+            </a:r>
+          </a:p>
+          <a:p>
+            <a:pPr lvl="0"/>
+            <a:r>
+              <a:rPr/>
+              <a:t>Turbine Efficiency</a:t>
+            </a:r>
+          </a:p>
+          <a:p>
+            <a:pPr lvl="0"/>
+            <a:r>
+              <a:rPr/>
+              <a:t>Power Plant Efficiency</a:t>
+            </a:r>
+          </a:p>
+        </p:txBody>
+      </p:sp>
+    </p:spTree>
+  </p:cSld>
+</p:sld>
+</file>
+
+<file path=ppt/slides/slide8.xml><?xml version="1.0" encoding="utf-8"?>
+<p:sld xmlns:a="http://schemas.openxmlformats.org/drawingml/2006/main" xmlns:r="http://schemas.openxmlformats.org/officeDocument/2006/relationships" xmlns:p="http://schemas.openxmlformats.org/presentationml/2006/main">
+  <p:cSld>
+    <p:spTree>
+      <p:nvGrpSpPr>
+        <p:cNvPr id="1" name=""/>
+        <p:cNvGrpSpPr/>
+        <p:nvPr/>
+      </p:nvGrpSpPr>
+      <p:grpSpPr>
+        <a:xfrm>
+          <a:off x="0" y="0"/>
+          <a:ext cx="0" cy="0"/>
+          <a:chOff x="0" y="0"/>
+          <a:chExt cx="0" cy="0"/>
+        </a:xfrm>
+      </p:grpSpPr>
+      <p:sp>
+        <p:nvSpPr>
+          <p:cNvPr id="2" name="Title 1"/>
+          <p:cNvSpPr>
+            <a:spLocks noGrp="1"/>
+          </p:cNvSpPr>
+          <p:nvPr>
+            <p:ph type="title"/>
+          </p:nvPr>
+        </p:nvSpPr>
+        <p:spPr>
+          <a:xfrm>
+            <a:off x="722313" y="3305176"/>
+            <a:ext cx="7772400" cy="1021556"/>
+          </a:xfrm>
+        </p:spPr>
+        <p:txBody>
+          <a:bodyPr/>
+          <a:lstStyle/>
+          <a:p>
+            <a:pPr lvl="0" indent="0" marL="0">
+              <a:buNone/>
+            </a:pPr>
+            <a:r>
+              <a:rPr/>
+              <a:t>Boiler Efficiency</a:t>
+            </a:r>
+          </a:p>
+        </p:txBody>
+      </p:sp>
+    </p:spTree>
+  </p:cSld>
+</p:sld>
+</file>
+
+<file path=ppt/slides/slide9.xml><?xml version="1.0" encoding="utf-8"?>
+<p:sld xmlns:a="http://schemas.openxmlformats.org/drawingml/2006/main" xmlns:r="http://schemas.openxmlformats.org/officeDocument/2006/relationships" xmlns:p="http://schemas.openxmlformats.org/presentationml/2006/main">
+  <p:cSld>
+    <p:spTree>
+      <p:nvGrpSpPr>
+        <p:cNvPr id="1" name=""/>
+        <p:cNvGrpSpPr/>
+        <p:nvPr/>
+      </p:nvGrpSpPr>
+      <p:grpSpPr>
+        <a:xfrm>
+          <a:off x="0" y="0"/>
+          <a:ext cx="0" cy="0"/>
+          <a:chOff x="0" y="0"/>
+          <a:chExt cx="0" cy="0"/>
+        </a:xfrm>
+      </p:grpSpPr>
+      <p:sp>
+        <p:nvSpPr>
+          <p:cNvPr id="2" name="Title 1"/>
+          <p:cNvSpPr>
+            <a:spLocks noGrp="1"/>
+          </p:cNvSpPr>
+          <p:nvPr>
+            <p:ph type="title"/>
+          </p:nvPr>
+        </p:nvSpPr>
+        <p:spPr/>
+        <p:txBody>
+          <a:bodyPr/>
+          <a:lstStyle/>
+          <a:p>
+            <a:pPr lvl="0" indent="0" marL="0">
+              <a:buNone/>
+            </a:pPr>
+            <a:r>
+              <a:rPr/>
+              <a:t>Objective and Theory</a:t>
+            </a:r>
+          </a:p>
+        </p:txBody>
+      </p:sp>
+      <mc:AlternateContent xmlns:mc="http://schemas.openxmlformats.org/markup-compatibility/2006">
+        <mc:Choice xmlns:a14="http://schemas.microsoft.com/office/drawing/2010/main" Requires="a14">
+          <p:sp>
+            <p:nvSpPr>
+              <p:cNvPr id="3" name="Content Placeholder 2"/>
+              <p:cNvSpPr>
+                <a:spLocks noGrp="1"/>
+              </p:cNvSpPr>
+              <p:nvPr>
+                <p:ph idx="1"/>
+              </p:nvPr>
+            </p:nvSpPr>
+            <p:spPr/>
+            <p:txBody>
+              <a:bodyPr/>
+              <a:lstStyle/>
+              <a:p>
+                <a:pPr lvl="0"/>
+                <a:r>
+                  <a:rPr/>
+                  <a:t>Operate the plant in four modes and compute boiler thermal efficiency: 230 MW burning HFO, 80% load burning biofuel, 80% load burning coal, and 80% load burning coal with soot buildup</a:t>
+                </a:r>
+              </a:p>
+              <a:p>
+                <a:pPr lvl="0"/>
+                <a:r>
+                  <a:rPr/>
+                  <a:t>Boiler thermal efficiency is the ratio of energy to steam over energy from fuel</a:t>
+                </a:r>
+              </a:p>
+              <a:p>
+                <a:pPr lvl="0"/>
+                <a14:m>
+                  <m:oMathPara xmlns:m="http://schemas.openxmlformats.org/officeDocument/2006/math">
+                    <m:oMathParaPr>
+                      <m:jc m:val="center"/>
+                    </m:oMathParaPr>
+                    <m:oMath>
+                      <m:sSub>
+                        <m:e>
+                          <m:r>
+                            <m:t>η</m:t>
+                          </m:r>
+                        </m:e>
+                        <m:sub>
+                          <m:r>
+                            <m:rPr>
+                              <m:nor/>
+                              <m:sty m:val="p"/>
+                            </m:rPr>
+                            <m:t>boiler</m:t>
+                          </m:r>
+                        </m:sub>
+                      </m:sSub>
+                      <m:r>
+                        <m:rPr>
+                          <m:sty m:val="p"/>
+                        </m:rPr>
+                        <m:t>=</m:t>
+                      </m:r>
+                      <m:f>
+                        <m:fPr>
+                          <m:type m:val="bar"/>
+                        </m:fPr>
+                        <m:num>
+                          <m:sSub>
+                            <m:e>
+                              <m:r>
+                                <m:t>m</m:t>
+                              </m:r>
+                            </m:e>
+                            <m:sub>
+                              <m:r>
+                                <m:t>s</m:t>
+                              </m:r>
+                            </m:sub>
+                          </m:sSub>
+                          <m:r>
+                            <m:rPr>
+                              <m:sty m:val="p"/>
+                            </m:rPr>
+                            <m:t>(</m:t>
+                          </m:r>
+                          <m:sSub>
+                            <m:e>
+                              <m:r>
+                                <m:t>h</m:t>
+                              </m:r>
+                            </m:e>
+                            <m:sub>
+                              <m:r>
+                                <m:t>2</m:t>
+                              </m:r>
+                            </m:sub>
+                          </m:sSub>
+                          <m:r>
+                            <m:rPr>
+                              <m:sty m:val="p"/>
+                            </m:rPr>
+                            <m:t>−</m:t>
+                          </m:r>
+                          <m:sSub>
+                            <m:e>
+                              <m:r>
+                                <m:t>h</m:t>
+                              </m:r>
+                            </m:e>
+                            <m:sub>
+                              <m:r>
+                                <m:t>1</m:t>
+                              </m:r>
+                            </m:sub>
+                          </m:sSub>
+                          <m:r>
+                            <m:rPr>
+                              <m:sty m:val="p"/>
+                            </m:rPr>
+                            <m:t>)</m:t>
+                          </m:r>
+                        </m:num>
+                        <m:den>
+                          <m:sSub>
+                            <m:e>
+                              <m:r>
+                                <m:t>m</m:t>
+                              </m:r>
+                            </m:e>
+                            <m:sub>
+                              <m:r>
+                                <m:t>f</m:t>
+                              </m:r>
+                            </m:sub>
+                          </m:sSub>
+                          <m:r>
+                            <m:t>H</m:t>
+                          </m:r>
+                          <m:r>
+                            <m:t>V</m:t>
+                          </m:r>
+                        </m:den>
+                      </m:f>
+                      <m:r>
+                        <m:rPr>
+                          <m:sty m:val="p"/>
+                        </m:rPr>
+                        <m:t>×</m:t>
+                      </m:r>
+                      <m:r>
+                        <m:t>100</m:t>
+                      </m:r>
+                      <m:r>
+                        <m:rPr>
+                          <m:sty m:val="p"/>
+                        </m:rPr>
+                        <m:t>%</m:t>
+                      </m:r>
+                    </m:oMath>
+                  </m:oMathPara>
+                </a14:m>
               </a:p>
             </p:txBody>
           </p:sp>
